--- a/assets/figures-editable/c1-c2/c2-e02.pptx
+++ b/assets/figures-editable/c1-c2/c2-e02.pptx
@@ -7,7 +7,7 @@
   <p:sldIdLst>
     <p:sldId id="256" r:id="rId7"/>
   </p:sldIdLst>
-  <p:sldSz cx="11948160" cy="7924799" type="screen4x3"/>
+  <p:sldSz cx="12191695" cy="6858000" type="screen4x3"/>
   <p:notesSz cx="6858000" cy="9144000"/>
   <p:defaultTextStyle>
     <a:defPPr>
@@ -3098,14 +3098,14 @@
       <p:grpSpPr/>
       <p:sp>
         <p:nvSpPr>
-          <p:cNvPr id="2" name="text1" descr="sci-ppt:C2-E02-001"/>
+          <p:cNvPr id="2" name="C2-E02 text 0" descr="sci-ppt:o000"/>
           <p:cNvSpPr txBox="1"/>
           <p:nvPr/>
         </p:nvSpPr>
         <p:spPr>
           <a:xfrm>
-            <a:off x="316992" y="268224"/>
-            <a:ext cx="11277600" cy="359054"/>
+            <a:off x="274320" y="118872"/>
+            <a:ext cx="11612880" cy="340105"/>
           </a:xfrm>
           <a:prstGeom prst="rect">
             <a:avLst/>
@@ -3114,7 +3114,7 @@
           <a:effectLst/>
         </p:spPr>
         <p:txBody>
-          <a:bodyPr wrap="none" lIns="27432" rIns="27432" tIns="18288" bIns="18288" anchor="ctr">
+          <a:bodyPr wrap="none" lIns="18288" rIns="18288" tIns="18288" bIns="18288" anchor="t">
             <a:spAutoFit/>
           </a:bodyPr>
           <a:lstStyle/>
@@ -3125,111 +3125,115 @@
               </a:spcAft>
             </a:pPr>
             <a:r>
-              <a:rPr sz="1823" b="0" i="0">
+              <a:rPr sz="1900" b="1" i="0">
                 <a:solidFill>
                   <a:srgbClr val="8EDBD4"/>
                 </a:solidFill>
                 <a:latin typeface="Arial"/>
               </a:rPr>
-              <a:t>C2-E02 | Physical-variable diagram</a:t>
-            </a:r>
-          </a:p>
-        </p:txBody>
-      </p:sp>
-      <p:sp>
-        <p:nvSpPr>
-          <p:cNvPr id="3" name="ellipse2" descr="sci-ppt:C2-E02-002"/>
-          <p:cNvSpPr/>
+              <a:t>C2-E02 · Exact integral of the prescribed profile</a:t>
+            </a:r>
+          </a:p>
+        </p:txBody>
+      </p:sp>
+      <p:cxnSp>
+        <p:nvCxnSpPr>
+          <p:cNvPr id="3" name="C2-E02 line 1" descr="sci-ppt:o001"/>
+          <p:cNvCxnSpPr/>
           <p:nvPr/>
-        </p:nvSpPr>
-        <p:spPr>
-          <a:xfrm>
-            <a:off x="1402080" y="1341120"/>
-            <a:ext cx="2560320" cy="2560320"/>
-          </a:xfrm>
-          <a:prstGeom prst="ellipse">
+        </p:nvCxnSpPr>
+        <p:spPr>
+          <a:xfrm>
+            <a:off x="868680" y="5029200"/>
+            <a:ext cx="5120640" cy="0"/>
+          </a:xfrm>
+          <a:prstGeom prst="line">
             <a:avLst/>
           </a:prstGeom>
-          <a:noFill/>
-          <a:ln w="21590">
+          <a:ln w="19050">
             <a:solidFill>
               <a:srgbClr val="B4C7D2"/>
             </a:solidFill>
           </a:ln>
           <a:effectLst/>
         </p:spPr>
-        <p:txBody>
-          <a:bodyPr rtlCol="0" anchor="ctr"/>
-          <a:lstStyle/>
-          <a:p>
-            <a:pPr algn="ctr"/>
-          </a:p>
-        </p:txBody>
-      </p:sp>
-      <p:sp>
-        <p:nvSpPr>
-          <p:cNvPr id="4" name="ellipse3" descr="sci-ppt:C2-E02-003"/>
-          <p:cNvSpPr/>
+      </p:cxnSp>
+      <p:cxnSp>
+        <p:nvCxnSpPr>
+          <p:cNvPr id="4" name="C2-E02 line 2" descr="sci-ppt:o002"/>
+          <p:cNvCxnSpPr/>
           <p:nvPr/>
-        </p:nvSpPr>
-        <p:spPr>
-          <a:xfrm>
-            <a:off x="1914144" y="1853184"/>
-            <a:ext cx="1536192" cy="1536192"/>
-          </a:xfrm>
-          <a:prstGeom prst="ellipse">
+        </p:nvCxnSpPr>
+        <p:spPr>
+          <a:xfrm>
+            <a:off x="868680" y="1371600"/>
+            <a:ext cx="0" cy="3657600"/>
+          </a:xfrm>
+          <a:prstGeom prst="line">
             <a:avLst/>
           </a:prstGeom>
-          <a:noFill/>
-          <a:ln w="21590">
+          <a:ln w="19050">
             <a:solidFill>
               <a:srgbClr val="B4C7D2"/>
             </a:solidFill>
           </a:ln>
           <a:effectLst/>
         </p:spPr>
-        <p:txBody>
-          <a:bodyPr rtlCol="0" anchor="ctr"/>
-          <a:lstStyle/>
-          <a:p>
-            <a:pPr algn="ctr"/>
-          </a:p>
-        </p:txBody>
-      </p:sp>
+      </p:cxnSp>
       <p:cxnSp>
         <p:nvCxnSpPr>
-          <p:cNvPr id="5" name="arrow4" descr="sci-ppt:C2-E02-004"/>
+          <p:cNvPr id="5" name="C2-E02 line 3" descr="sci-ppt:o003"/>
           <p:cNvCxnSpPr/>
           <p:nvPr/>
         </p:nvCxnSpPr>
         <p:spPr>
           <a:xfrm>
-            <a:off x="2682240" y="2621280"/>
-            <a:ext cx="1280159" cy="0"/>
+            <a:off x="868680" y="5029200"/>
+            <a:ext cx="0" cy="64008"/>
           </a:xfrm>
           <a:prstGeom prst="line">
             <a:avLst/>
           </a:prstGeom>
-          <a:ln w="25400">
+          <a:ln w="12700">
             <a:solidFill>
-              <a:srgbClr val="8EDBD4"/>
+              <a:srgbClr val="B4C7D2"/>
             </a:solidFill>
-            <a:headEnd type="none" w="med" len="med"/>
-            <a:tailEnd type="triangle" w="med" len="med"/>
           </a:ln>
           <a:effectLst/>
         </p:spPr>
       </p:cxnSp>
-      <p:sp>
-        <p:nvSpPr>
-          <p:cNvPr id="6" name="text5" descr="sci-ppt:C2-E02-005"/>
+      <p:cxnSp>
+        <p:nvCxnSpPr>
+          <p:cNvPr id="6" name="C2-E02 line 4" descr="sci-ppt:o004"/>
+          <p:cNvCxnSpPr/>
+          <p:nvPr/>
+        </p:nvCxnSpPr>
+        <p:spPr>
+          <a:xfrm>
+            <a:off x="868680" y="1371600"/>
+            <a:ext cx="0" cy="3657600"/>
+          </a:xfrm>
+          <a:prstGeom prst="line">
+            <a:avLst/>
+          </a:prstGeom>
+          <a:ln w="7620">
+            <a:solidFill>
+              <a:srgbClr val="2E4756"/>
+            </a:solidFill>
+          </a:ln>
+          <a:effectLst/>
+        </p:spPr>
+      </p:cxnSp>
+      <p:sp>
+        <p:nvSpPr>
+          <p:cNvPr id="7" name="C2-E02 text 5" descr="sci-ppt:o005"/>
           <p:cNvSpPr txBox="1"/>
           <p:nvPr/>
         </p:nvSpPr>
         <p:spPr>
           <a:xfrm>
-            <a:off x="2926080" y="2743200"/>
-            <a:ext cx="975360" cy="377952"/>
+            <a:off x="411479" y="5111496"/>
+            <a:ext cx="914400" cy="208407"/>
           </a:xfrm>
           <a:prstGeom prst="rect">
             <a:avLst/>
@@ -3238,38 +3242,82 @@
           <a:effectLst/>
         </p:spPr>
         <p:txBody>
-          <a:bodyPr wrap="none" lIns="27432" rIns="27432" tIns="18288" bIns="18288" anchor="ctr">
+          <a:bodyPr wrap="none" lIns="18288" rIns="18288" tIns="18288" bIns="18288" anchor="t">
             <a:spAutoFit/>
           </a:bodyPr>
           <a:lstStyle/>
           <a:p>
-            <a:pPr algn="l">
+            <a:pPr algn="ctr">
               <a:spcAft>
                 <a:spcPts val="0"/>
               </a:spcAft>
             </a:pPr>
             <a:r>
-              <a:rPr sz="1920" b="0" i="0">
+              <a:rPr sz="1050" b="0" i="0">
                 <a:solidFill>
-                  <a:srgbClr val="E7F0F3"/>
+                  <a:srgbClr val="B4C7D2"/>
                 </a:solidFill>
                 <a:latin typeface="Arial"/>
               </a:rPr>
-              <a:t>w</a:t>
-            </a:r>
-          </a:p>
-        </p:txBody>
-      </p:sp>
-      <p:sp>
-        <p:nvSpPr>
-          <p:cNvPr id="7" name="text6" descr="sci-ppt:C2-E02-006"/>
+              <a:t>0.0</a:t>
+            </a:r>
+          </a:p>
+        </p:txBody>
+      </p:sp>
+      <p:cxnSp>
+        <p:nvCxnSpPr>
+          <p:cNvPr id="8" name="C2-E02 line 6" descr="sci-ppt:o006"/>
+          <p:cNvCxnSpPr/>
+          <p:nvPr/>
+        </p:nvCxnSpPr>
+        <p:spPr>
+          <a:xfrm>
+            <a:off x="1935480" y="5029200"/>
+            <a:ext cx="0" cy="64008"/>
+          </a:xfrm>
+          <a:prstGeom prst="line">
+            <a:avLst/>
+          </a:prstGeom>
+          <a:ln w="12700">
+            <a:solidFill>
+              <a:srgbClr val="B4C7D2"/>
+            </a:solidFill>
+          </a:ln>
+          <a:effectLst/>
+        </p:spPr>
+      </p:cxnSp>
+      <p:cxnSp>
+        <p:nvCxnSpPr>
+          <p:cNvPr id="9" name="C2-E02 line 7" descr="sci-ppt:o007"/>
+          <p:cNvCxnSpPr/>
+          <p:nvPr/>
+        </p:nvCxnSpPr>
+        <p:spPr>
+          <a:xfrm>
+            <a:off x="1935480" y="1371600"/>
+            <a:ext cx="0" cy="3657600"/>
+          </a:xfrm>
+          <a:prstGeom prst="line">
+            <a:avLst/>
+          </a:prstGeom>
+          <a:ln w="7620">
+            <a:solidFill>
+              <a:srgbClr val="2E4756"/>
+            </a:solidFill>
+          </a:ln>
+          <a:effectLst/>
+        </p:spPr>
+      </p:cxnSp>
+      <p:sp>
+        <p:nvSpPr>
+          <p:cNvPr id="10" name="C2-E02 text 8" descr="sci-ppt:o008"/>
           <p:cNvSpPr txBox="1"/>
           <p:nvPr/>
         </p:nvSpPr>
         <p:spPr>
           <a:xfrm>
-            <a:off x="1402080" y="4084320"/>
-            <a:ext cx="4876800" cy="340156"/>
+            <a:off x="1478280" y="5111496"/>
+            <a:ext cx="914400" cy="208407"/>
           </a:xfrm>
           <a:prstGeom prst="rect">
             <a:avLst/>
@@ -3278,86 +3326,82 @@
           <a:effectLst/>
         </p:spPr>
         <p:txBody>
-          <a:bodyPr wrap="none" lIns="27432" rIns="27432" tIns="18288" bIns="18288" anchor="ctr">
+          <a:bodyPr wrap="none" lIns="18288" rIns="18288" tIns="18288" bIns="18288" anchor="t">
             <a:spAutoFit/>
           </a:bodyPr>
           <a:lstStyle/>
           <a:p>
-            <a:pPr algn="l">
+            <a:pPr algn="ctr">
               <a:spcAft>
                 <a:spcPts val="0"/>
               </a:spcAft>
             </a:pPr>
             <a:r>
-              <a:rPr sz="1728" b="0" i="0">
+              <a:rPr sz="1050" b="0" i="0">
                 <a:solidFill>
-                  <a:srgbClr val="E7F0F3"/>
+                  <a:srgbClr val="B4C7D2"/>
                 </a:solidFill>
                 <a:latin typeface="Arial"/>
               </a:rPr>
-              <a:t>Illuminated transverse plane</a:t>
+              <a:t>0.5</a:t>
             </a:r>
           </a:p>
         </p:txBody>
       </p:sp>
       <p:cxnSp>
         <p:nvCxnSpPr>
-          <p:cNvPr id="8" name="arrow7" descr="sci-ppt:C2-E02-007"/>
+          <p:cNvPr id="11" name="C2-E02 line 9" descr="sci-ppt:o009"/>
           <p:cNvCxnSpPr/>
           <p:nvPr/>
         </p:nvCxnSpPr>
         <p:spPr>
           <a:xfrm>
-            <a:off x="6583680" y="3962399"/>
-            <a:ext cx="4267200" cy="0"/>
+            <a:off x="3002280" y="5029200"/>
+            <a:ext cx="0" cy="64008"/>
           </a:xfrm>
           <a:prstGeom prst="line">
             <a:avLst/>
           </a:prstGeom>
-          <a:ln w="25400">
+          <a:ln w="12700">
             <a:solidFill>
-              <a:srgbClr val="8EDBD4"/>
+              <a:srgbClr val="B4C7D2"/>
             </a:solidFill>
-            <a:headEnd type="none" w="med" len="med"/>
-            <a:tailEnd type="triangle" w="med" len="med"/>
           </a:ln>
           <a:effectLst/>
         </p:spPr>
       </p:cxnSp>
       <p:cxnSp>
         <p:nvCxnSpPr>
-          <p:cNvPr id="9" name="arrow8" descr="sci-ppt:C2-E02-008"/>
+          <p:cNvPr id="12" name="C2-E02 line 10" descr="sci-ppt:o010"/>
           <p:cNvCxnSpPr/>
           <p:nvPr/>
         </p:nvCxnSpPr>
         <p:spPr>
-          <a:xfrm flipV="1">
-            <a:off x="6583680" y="1402080"/>
-            <a:ext cx="0" cy="2560319"/>
+          <a:xfrm>
+            <a:off x="3002280" y="1371600"/>
+            <a:ext cx="0" cy="3657600"/>
           </a:xfrm>
           <a:prstGeom prst="line">
             <a:avLst/>
           </a:prstGeom>
-          <a:ln w="25400">
+          <a:ln w="7620">
             <a:solidFill>
-              <a:srgbClr val="8EDBD4"/>
+              <a:srgbClr val="2E4756"/>
             </a:solidFill>
-            <a:headEnd type="none" w="med" len="med"/>
-            <a:tailEnd type="triangle" w="med" len="med"/>
           </a:ln>
           <a:effectLst/>
         </p:spPr>
       </p:cxnSp>
       <p:sp>
         <p:nvSpPr>
-          <p:cNvPr id="10" name="text9" descr="sci-ppt:C2-E02-009"/>
+          <p:cNvPr id="13" name="C2-E02 text 11" descr="sci-ppt:o011"/>
           <p:cNvSpPr txBox="1"/>
           <p:nvPr/>
         </p:nvSpPr>
         <p:spPr>
           <a:xfrm>
-            <a:off x="9875520" y="4084320"/>
-            <a:ext cx="1828800" cy="321259"/>
+            <a:off x="2545080" y="5111496"/>
+            <a:ext cx="914400" cy="208407"/>
           </a:xfrm>
           <a:prstGeom prst="rect">
             <a:avLst/>
@@ -3366,18 +3410,500 @@
           <a:effectLst/>
         </p:spPr>
         <p:txBody>
-          <a:bodyPr wrap="none" lIns="27432" rIns="27432" tIns="18288" bIns="18288" anchor="ctr">
+          <a:bodyPr wrap="none" lIns="18288" rIns="18288" tIns="18288" bIns="18288" anchor="t">
             <a:spAutoFit/>
           </a:bodyPr>
           <a:lstStyle/>
           <a:p>
-            <a:pPr algn="l">
+            <a:pPr algn="ctr">
               <a:spcAft>
                 <a:spcPts val="0"/>
               </a:spcAft>
             </a:pPr>
             <a:r>
-              <a:rPr sz="1632" b="0" i="0">
+              <a:rPr sz="1050" b="0" i="0">
+                <a:solidFill>
+                  <a:srgbClr val="B4C7D2"/>
+                </a:solidFill>
+                <a:latin typeface="Arial"/>
+              </a:rPr>
+              <a:t>1.0</a:t>
+            </a:r>
+          </a:p>
+        </p:txBody>
+      </p:sp>
+      <p:cxnSp>
+        <p:nvCxnSpPr>
+          <p:cNvPr id="14" name="C2-E02 line 12" descr="sci-ppt:o012"/>
+          <p:cNvCxnSpPr/>
+          <p:nvPr/>
+        </p:nvCxnSpPr>
+        <p:spPr>
+          <a:xfrm>
+            <a:off x="4069080" y="5029200"/>
+            <a:ext cx="0" cy="64008"/>
+          </a:xfrm>
+          <a:prstGeom prst="line">
+            <a:avLst/>
+          </a:prstGeom>
+          <a:ln w="12700">
+            <a:solidFill>
+              <a:srgbClr val="B4C7D2"/>
+            </a:solidFill>
+          </a:ln>
+          <a:effectLst/>
+        </p:spPr>
+      </p:cxnSp>
+      <p:cxnSp>
+        <p:nvCxnSpPr>
+          <p:cNvPr id="15" name="C2-E02 line 13" descr="sci-ppt:o013"/>
+          <p:cNvCxnSpPr/>
+          <p:nvPr/>
+        </p:nvCxnSpPr>
+        <p:spPr>
+          <a:xfrm>
+            <a:off x="4069080" y="1371600"/>
+            <a:ext cx="0" cy="3657600"/>
+          </a:xfrm>
+          <a:prstGeom prst="line">
+            <a:avLst/>
+          </a:prstGeom>
+          <a:ln w="7620">
+            <a:solidFill>
+              <a:srgbClr val="2E4756"/>
+            </a:solidFill>
+          </a:ln>
+          <a:effectLst/>
+        </p:spPr>
+      </p:cxnSp>
+      <p:sp>
+        <p:nvSpPr>
+          <p:cNvPr id="16" name="C2-E02 text 14" descr="sci-ppt:o014"/>
+          <p:cNvSpPr txBox="1"/>
+          <p:nvPr/>
+        </p:nvSpPr>
+        <p:spPr>
+          <a:xfrm>
+            <a:off x="3611880" y="5111496"/>
+            <a:ext cx="914400" cy="208407"/>
+          </a:xfrm>
+          <a:prstGeom prst="rect">
+            <a:avLst/>
+          </a:prstGeom>
+          <a:noFill/>
+          <a:effectLst/>
+        </p:spPr>
+        <p:txBody>
+          <a:bodyPr wrap="none" lIns="18288" rIns="18288" tIns="18288" bIns="18288" anchor="t">
+            <a:spAutoFit/>
+          </a:bodyPr>
+          <a:lstStyle/>
+          <a:p>
+            <a:pPr algn="ctr">
+              <a:spcAft>
+                <a:spcPts val="0"/>
+              </a:spcAft>
+            </a:pPr>
+            <a:r>
+              <a:rPr sz="1050" b="0" i="0">
+                <a:solidFill>
+                  <a:srgbClr val="B4C7D2"/>
+                </a:solidFill>
+                <a:latin typeface="Arial"/>
+              </a:rPr>
+              <a:t>1.5</a:t>
+            </a:r>
+          </a:p>
+        </p:txBody>
+      </p:sp>
+      <p:cxnSp>
+        <p:nvCxnSpPr>
+          <p:cNvPr id="17" name="C2-E02 line 15" descr="sci-ppt:o015"/>
+          <p:cNvCxnSpPr/>
+          <p:nvPr/>
+        </p:nvCxnSpPr>
+        <p:spPr>
+          <a:xfrm>
+            <a:off x="5135880" y="5029200"/>
+            <a:ext cx="0" cy="64008"/>
+          </a:xfrm>
+          <a:prstGeom prst="line">
+            <a:avLst/>
+          </a:prstGeom>
+          <a:ln w="12700">
+            <a:solidFill>
+              <a:srgbClr val="B4C7D2"/>
+            </a:solidFill>
+          </a:ln>
+          <a:effectLst/>
+        </p:spPr>
+      </p:cxnSp>
+      <p:cxnSp>
+        <p:nvCxnSpPr>
+          <p:cNvPr id="18" name="C2-E02 line 16" descr="sci-ppt:o016"/>
+          <p:cNvCxnSpPr/>
+          <p:nvPr/>
+        </p:nvCxnSpPr>
+        <p:spPr>
+          <a:xfrm>
+            <a:off x="5135880" y="1371600"/>
+            <a:ext cx="0" cy="3657600"/>
+          </a:xfrm>
+          <a:prstGeom prst="line">
+            <a:avLst/>
+          </a:prstGeom>
+          <a:ln w="7620">
+            <a:solidFill>
+              <a:srgbClr val="2E4756"/>
+            </a:solidFill>
+          </a:ln>
+          <a:effectLst/>
+        </p:spPr>
+      </p:cxnSp>
+      <p:sp>
+        <p:nvSpPr>
+          <p:cNvPr id="19" name="C2-E02 text 17" descr="sci-ppt:o017"/>
+          <p:cNvSpPr txBox="1"/>
+          <p:nvPr/>
+        </p:nvSpPr>
+        <p:spPr>
+          <a:xfrm>
+            <a:off x="4678680" y="5111496"/>
+            <a:ext cx="914400" cy="208407"/>
+          </a:xfrm>
+          <a:prstGeom prst="rect">
+            <a:avLst/>
+          </a:prstGeom>
+          <a:noFill/>
+          <a:effectLst/>
+        </p:spPr>
+        <p:txBody>
+          <a:bodyPr wrap="none" lIns="18288" rIns="18288" tIns="18288" bIns="18288" anchor="t">
+            <a:spAutoFit/>
+          </a:bodyPr>
+          <a:lstStyle/>
+          <a:p>
+            <a:pPr algn="ctr">
+              <a:spcAft>
+                <a:spcPts val="0"/>
+              </a:spcAft>
+            </a:pPr>
+            <a:r>
+              <a:rPr sz="1050" b="0" i="0">
+                <a:solidFill>
+                  <a:srgbClr val="B4C7D2"/>
+                </a:solidFill>
+                <a:latin typeface="Arial"/>
+              </a:rPr>
+              <a:t>2.0</a:t>
+            </a:r>
+          </a:p>
+        </p:txBody>
+      </p:sp>
+      <p:cxnSp>
+        <p:nvCxnSpPr>
+          <p:cNvPr id="20" name="C2-E02 line 18" descr="sci-ppt:o018"/>
+          <p:cNvCxnSpPr/>
+          <p:nvPr/>
+        </p:nvCxnSpPr>
+        <p:spPr>
+          <a:xfrm>
+            <a:off x="804671" y="5029200"/>
+            <a:ext cx="64009" cy="0"/>
+          </a:xfrm>
+          <a:prstGeom prst="line">
+            <a:avLst/>
+          </a:prstGeom>
+          <a:ln w="12700">
+            <a:solidFill>
+              <a:srgbClr val="B4C7D2"/>
+            </a:solidFill>
+          </a:ln>
+          <a:effectLst/>
+        </p:spPr>
+      </p:cxnSp>
+      <p:cxnSp>
+        <p:nvCxnSpPr>
+          <p:cNvPr id="21" name="C2-E02 line 19" descr="sci-ppt:o019"/>
+          <p:cNvCxnSpPr/>
+          <p:nvPr/>
+        </p:nvCxnSpPr>
+        <p:spPr>
+          <a:xfrm>
+            <a:off x="804671" y="3903784"/>
+            <a:ext cx="64009" cy="0"/>
+          </a:xfrm>
+          <a:prstGeom prst="line">
+            <a:avLst/>
+          </a:prstGeom>
+          <a:ln w="12700">
+            <a:solidFill>
+              <a:srgbClr val="B4C7D2"/>
+            </a:solidFill>
+          </a:ln>
+          <a:effectLst/>
+        </p:spPr>
+      </p:cxnSp>
+      <p:cxnSp>
+        <p:nvCxnSpPr>
+          <p:cNvPr id="22" name="C2-E02 line 20" descr="sci-ppt:o020"/>
+          <p:cNvCxnSpPr/>
+          <p:nvPr/>
+        </p:nvCxnSpPr>
+        <p:spPr>
+          <a:xfrm>
+            <a:off x="868680" y="3903784"/>
+            <a:ext cx="5120640" cy="0"/>
+          </a:xfrm>
+          <a:prstGeom prst="line">
+            <a:avLst/>
+          </a:prstGeom>
+          <a:ln w="7620">
+            <a:solidFill>
+              <a:srgbClr val="2E4756"/>
+            </a:solidFill>
+          </a:ln>
+          <a:effectLst/>
+        </p:spPr>
+      </p:cxnSp>
+      <p:sp>
+        <p:nvSpPr>
+          <p:cNvPr id="23" name="C2-E02 text 21" descr="sci-ppt:o021"/>
+          <p:cNvSpPr txBox="1"/>
+          <p:nvPr/>
+        </p:nvSpPr>
+        <p:spPr>
+          <a:xfrm>
+            <a:off x="0" y="3821488"/>
+            <a:ext cx="777240" cy="208407"/>
+          </a:xfrm>
+          <a:prstGeom prst="rect">
+            <a:avLst/>
+          </a:prstGeom>
+          <a:noFill/>
+          <a:effectLst/>
+        </p:spPr>
+        <p:txBody>
+          <a:bodyPr wrap="none" lIns="18288" rIns="18288" tIns="18288" bIns="18288" anchor="t">
+            <a:spAutoFit/>
+          </a:bodyPr>
+          <a:lstStyle/>
+          <a:p>
+            <a:pPr algn="r">
+              <a:spcAft>
+                <a:spcPts val="0"/>
+              </a:spcAft>
+            </a:pPr>
+            <a:r>
+              <a:rPr sz="1050" b="0" i="0">
+                <a:solidFill>
+                  <a:srgbClr val="B4C7D2"/>
+                </a:solidFill>
+                <a:latin typeface="Arial"/>
+              </a:rPr>
+              <a:t>0.2</a:t>
+            </a:r>
+          </a:p>
+        </p:txBody>
+      </p:sp>
+      <p:cxnSp>
+        <p:nvCxnSpPr>
+          <p:cNvPr id="24" name="C2-E02 line 22" descr="sci-ppt:o022"/>
+          <p:cNvCxnSpPr/>
+          <p:nvPr/>
+        </p:nvCxnSpPr>
+        <p:spPr>
+          <a:xfrm>
+            <a:off x="804671" y="2778369"/>
+            <a:ext cx="64009" cy="0"/>
+          </a:xfrm>
+          <a:prstGeom prst="line">
+            <a:avLst/>
+          </a:prstGeom>
+          <a:ln w="12700">
+            <a:solidFill>
+              <a:srgbClr val="B4C7D2"/>
+            </a:solidFill>
+          </a:ln>
+          <a:effectLst/>
+        </p:spPr>
+      </p:cxnSp>
+      <p:cxnSp>
+        <p:nvCxnSpPr>
+          <p:cNvPr id="25" name="C2-E02 line 23" descr="sci-ppt:o023"/>
+          <p:cNvCxnSpPr/>
+          <p:nvPr/>
+        </p:nvCxnSpPr>
+        <p:spPr>
+          <a:xfrm>
+            <a:off x="868680" y="2778369"/>
+            <a:ext cx="5120640" cy="0"/>
+          </a:xfrm>
+          <a:prstGeom prst="line">
+            <a:avLst/>
+          </a:prstGeom>
+          <a:ln w="7620">
+            <a:solidFill>
+              <a:srgbClr val="2E4756"/>
+            </a:solidFill>
+          </a:ln>
+          <a:effectLst/>
+        </p:spPr>
+      </p:cxnSp>
+      <p:sp>
+        <p:nvSpPr>
+          <p:cNvPr id="26" name="C2-E02 text 24" descr="sci-ppt:o024"/>
+          <p:cNvSpPr txBox="1"/>
+          <p:nvPr/>
+        </p:nvSpPr>
+        <p:spPr>
+          <a:xfrm>
+            <a:off x="0" y="2696073"/>
+            <a:ext cx="777240" cy="208407"/>
+          </a:xfrm>
+          <a:prstGeom prst="rect">
+            <a:avLst/>
+          </a:prstGeom>
+          <a:noFill/>
+          <a:effectLst/>
+        </p:spPr>
+        <p:txBody>
+          <a:bodyPr wrap="none" lIns="18288" rIns="18288" tIns="18288" bIns="18288" anchor="t">
+            <a:spAutoFit/>
+          </a:bodyPr>
+          <a:lstStyle/>
+          <a:p>
+            <a:pPr algn="r">
+              <a:spcAft>
+                <a:spcPts val="0"/>
+              </a:spcAft>
+            </a:pPr>
+            <a:r>
+              <a:rPr sz="1050" b="0" i="0">
+                <a:solidFill>
+                  <a:srgbClr val="B4C7D2"/>
+                </a:solidFill>
+                <a:latin typeface="Arial"/>
+              </a:rPr>
+              <a:t>0.4</a:t>
+            </a:r>
+          </a:p>
+        </p:txBody>
+      </p:sp>
+      <p:cxnSp>
+        <p:nvCxnSpPr>
+          <p:cNvPr id="27" name="C2-E02 line 25" descr="sci-ppt:o025"/>
+          <p:cNvCxnSpPr/>
+          <p:nvPr/>
+        </p:nvCxnSpPr>
+        <p:spPr>
+          <a:xfrm>
+            <a:off x="804671" y="1652953"/>
+            <a:ext cx="64009" cy="0"/>
+          </a:xfrm>
+          <a:prstGeom prst="line">
+            <a:avLst/>
+          </a:prstGeom>
+          <a:ln w="12700">
+            <a:solidFill>
+              <a:srgbClr val="B4C7D2"/>
+            </a:solidFill>
+          </a:ln>
+          <a:effectLst/>
+        </p:spPr>
+      </p:cxnSp>
+      <p:cxnSp>
+        <p:nvCxnSpPr>
+          <p:cNvPr id="28" name="C2-E02 line 26" descr="sci-ppt:o026"/>
+          <p:cNvCxnSpPr/>
+          <p:nvPr/>
+        </p:nvCxnSpPr>
+        <p:spPr>
+          <a:xfrm>
+            <a:off x="868680" y="1652953"/>
+            <a:ext cx="5120640" cy="0"/>
+          </a:xfrm>
+          <a:prstGeom prst="line">
+            <a:avLst/>
+          </a:prstGeom>
+          <a:ln w="7620">
+            <a:solidFill>
+              <a:srgbClr val="2E4756"/>
+            </a:solidFill>
+          </a:ln>
+          <a:effectLst/>
+        </p:spPr>
+      </p:cxnSp>
+      <p:sp>
+        <p:nvSpPr>
+          <p:cNvPr id="29" name="C2-E02 text 27" descr="sci-ppt:o027"/>
+          <p:cNvSpPr txBox="1"/>
+          <p:nvPr/>
+        </p:nvSpPr>
+        <p:spPr>
+          <a:xfrm>
+            <a:off x="0" y="1570657"/>
+            <a:ext cx="777240" cy="208407"/>
+          </a:xfrm>
+          <a:prstGeom prst="rect">
+            <a:avLst/>
+          </a:prstGeom>
+          <a:noFill/>
+          <a:effectLst/>
+        </p:spPr>
+        <p:txBody>
+          <a:bodyPr wrap="none" lIns="18288" rIns="18288" tIns="18288" bIns="18288" anchor="t">
+            <a:spAutoFit/>
+          </a:bodyPr>
+          <a:lstStyle/>
+          <a:p>
+            <a:pPr algn="r">
+              <a:spcAft>
+                <a:spcPts val="0"/>
+              </a:spcAft>
+            </a:pPr>
+            <a:r>
+              <a:rPr sz="1050" b="0" i="0">
+                <a:solidFill>
+                  <a:srgbClr val="B4C7D2"/>
+                </a:solidFill>
+                <a:latin typeface="Arial"/>
+              </a:rPr>
+              <a:t>0.6</a:t>
+            </a:r>
+          </a:p>
+        </p:txBody>
+      </p:sp>
+      <p:sp>
+        <p:nvSpPr>
+          <p:cNvPr id="30" name="C2-E02 text 28" descr="sci-ppt:o028"/>
+          <p:cNvSpPr txBox="1"/>
+          <p:nvPr/>
+        </p:nvSpPr>
+        <p:spPr>
+          <a:xfrm>
+            <a:off x="868680" y="5312664"/>
+            <a:ext cx="5120640" cy="231648"/>
+          </a:xfrm>
+          <a:prstGeom prst="rect">
+            <a:avLst/>
+          </a:prstGeom>
+          <a:noFill/>
+          <a:effectLst/>
+        </p:spPr>
+        <p:txBody>
+          <a:bodyPr wrap="none" lIns="18288" rIns="18288" tIns="18288" bIns="18288" anchor="t">
+            <a:spAutoFit/>
+          </a:bodyPr>
+          <a:lstStyle/>
+          <a:p>
+            <a:pPr algn="ctr">
+              <a:spcAft>
+                <a:spcPts val="0"/>
+              </a:spcAft>
+            </a:pPr>
+            <a:r>
+              <a:rPr sz="1200" b="0" i="0">
                 <a:solidFill>
                   <a:srgbClr val="E7F0F3"/>
                 </a:solidFill>
@@ -3390,14 +3916,14 @@
       </p:sp>
       <p:sp>
         <p:nvSpPr>
-          <p:cNvPr id="11" name="text10" descr="sci-ppt:C2-E02-010"/>
+          <p:cNvPr id="31" name="C2-E02 text 29" descr="sci-ppt:o029"/>
           <p:cNvSpPr txBox="1"/>
           <p:nvPr/>
         </p:nvSpPr>
         <p:spPr>
           <a:xfrm>
-            <a:off x="6461760" y="1036320"/>
-            <a:ext cx="3657600" cy="321259"/>
+            <a:off x="320040" y="1024128"/>
+            <a:ext cx="5120640" cy="231648"/>
           </a:xfrm>
           <a:prstGeom prst="rect">
             <a:avLst/>
@@ -3406,7 +3932,7 @@
           <a:effectLst/>
         </p:spPr>
         <p:txBody>
-          <a:bodyPr wrap="none" lIns="27432" rIns="27432" tIns="18288" bIns="18288" anchor="ctr">
+          <a:bodyPr wrap="none" lIns="18288" rIns="18288" tIns="18288" bIns="18288" anchor="t">
             <a:spAutoFit/>
           </a:bodyPr>
           <a:lstStyle/>
@@ -3417,907 +3943,3963 @@
               </a:spcAft>
             </a:pPr>
             <a:r>
-              <a:rPr sz="1632" b="0" i="0">
+              <a:rPr sz="1200" b="0" i="0">
                 <a:solidFill>
                   <a:srgbClr val="E7F0F3"/>
                 </a:solidFill>
                 <a:latin typeface="Arial"/>
               </a:rPr>
-              <a:t>F / F0</a:t>
-            </a:r>
-          </a:p>
-        </p:txBody>
-      </p:sp>
-      <p:cxnSp>
-        <p:nvCxnSpPr>
-          <p:cNvPr id="12" name="line11" descr="sci-ppt:C2-E02-011"/>
-          <p:cNvCxnSpPr/>
+              <a:t>ring energy 2πrF(r) / (π w F₀)</a:t>
+            </a:r>
+          </a:p>
+        </p:txBody>
+      </p:sp>
+      <p:sp>
+        <p:nvSpPr>
+          <p:cNvPr id="32" name="C2-E02 polygon 30" descr="sci-ppt:o030"/>
+          <p:cNvSpPr/>
           <p:nvPr/>
-        </p:nvCxnSpPr>
-        <p:spPr>
-          <a:xfrm>
-            <a:off x="6644640" y="1524000"/>
-            <a:ext cx="103632" cy="12161"/>
-          </a:xfrm>
-          <a:prstGeom prst="line">
+        </p:nvSpPr>
+        <p:spPr>
+          <a:xfrm>
+            <a:off x="868680" y="3322740"/>
+            <a:ext cx="5120640" cy="1706460"/>
+          </a:xfrm>
+          <a:custGeom>
             <a:avLst/>
-          </a:prstGeom>
-          <a:ln w="25400">
+            <a:gdLst/>
+            <a:ahLst/>
+            <a:cxnLst/>
+            <a:rect l="l" t="t" r="r" b="b"/>
+            <a:pathLst>
+              <a:path w="5120640" h="1706460">
+                <a:moveTo>
+                  <a:pt x="0" y="1706460"/>
+                </a:moveTo>
+                <a:lnTo>
+                  <a:pt x="17125" y="1661298"/>
+                </a:lnTo>
+                <a:lnTo>
+                  <a:pt x="34251" y="1616172"/>
+                </a:lnTo>
+                <a:lnTo>
+                  <a:pt x="51377" y="1571115"/>
+                </a:lnTo>
+                <a:lnTo>
+                  <a:pt x="68503" y="1526163"/>
+                </a:lnTo>
+                <a:lnTo>
+                  <a:pt x="85629" y="1481350"/>
+                </a:lnTo>
+                <a:lnTo>
+                  <a:pt x="102755" y="1436711"/>
+                </a:lnTo>
+                <a:lnTo>
+                  <a:pt x="119881" y="1392279"/>
+                </a:lnTo>
+                <a:lnTo>
+                  <a:pt x="137007" y="1348090"/>
+                </a:lnTo>
+                <a:lnTo>
+                  <a:pt x="154132" y="1304176"/>
+                </a:lnTo>
+                <a:lnTo>
+                  <a:pt x="171258" y="1260571"/>
+                </a:lnTo>
+                <a:lnTo>
+                  <a:pt x="188384" y="1217307"/>
+                </a:lnTo>
+                <a:lnTo>
+                  <a:pt x="205510" y="1174418"/>
+                </a:lnTo>
+                <a:lnTo>
+                  <a:pt x="222636" y="1131935"/>
+                </a:lnTo>
+                <a:lnTo>
+                  <a:pt x="239762" y="1089890"/>
+                </a:lnTo>
+                <a:lnTo>
+                  <a:pt x="256888" y="1048313"/>
+                </a:lnTo>
+                <a:lnTo>
+                  <a:pt x="274014" y="1007235"/>
+                </a:lnTo>
+                <a:lnTo>
+                  <a:pt x="291140" y="966686"/>
+                </a:lnTo>
+                <a:lnTo>
+                  <a:pt x="308265" y="926695"/>
+                </a:lnTo>
+                <a:lnTo>
+                  <a:pt x="325391" y="887289"/>
+                </a:lnTo>
+                <a:lnTo>
+                  <a:pt x="342517" y="848498"/>
+                </a:lnTo>
+                <a:lnTo>
+                  <a:pt x="359643" y="810346"/>
+                </a:lnTo>
+                <a:lnTo>
+                  <a:pt x="376769" y="772862"/>
+                </a:lnTo>
+                <a:lnTo>
+                  <a:pt x="393895" y="736068"/>
+                </a:lnTo>
+                <a:lnTo>
+                  <a:pt x="411021" y="699992"/>
+                </a:lnTo>
+                <a:lnTo>
+                  <a:pt x="428147" y="664654"/>
+                </a:lnTo>
+                <a:lnTo>
+                  <a:pt x="445273" y="630079"/>
+                </a:lnTo>
+                <a:lnTo>
+                  <a:pt x="462398" y="596288"/>
+                </a:lnTo>
+                <a:lnTo>
+                  <a:pt x="479524" y="563301"/>
+                </a:lnTo>
+                <a:lnTo>
+                  <a:pt x="496650" y="531138"/>
+                </a:lnTo>
+                <a:lnTo>
+                  <a:pt x="513776" y="499818"/>
+                </a:lnTo>
+                <a:lnTo>
+                  <a:pt x="530902" y="469359"/>
+                </a:lnTo>
+                <a:lnTo>
+                  <a:pt x="548028" y="439777"/>
+                </a:lnTo>
+                <a:lnTo>
+                  <a:pt x="565154" y="411089"/>
+                </a:lnTo>
+                <a:lnTo>
+                  <a:pt x="582280" y="383308"/>
+                </a:lnTo>
+                <a:lnTo>
+                  <a:pt x="599406" y="356448"/>
+                </a:lnTo>
+                <a:lnTo>
+                  <a:pt x="616531" y="330523"/>
+                </a:lnTo>
+                <a:lnTo>
+                  <a:pt x="633657" y="305542"/>
+                </a:lnTo>
+                <a:lnTo>
+                  <a:pt x="650783" y="281518"/>
+                </a:lnTo>
+                <a:lnTo>
+                  <a:pt x="667909" y="258458"/>
+                </a:lnTo>
+                <a:lnTo>
+                  <a:pt x="685035" y="236371"/>
+                </a:lnTo>
+                <a:lnTo>
+                  <a:pt x="702161" y="215265"/>
+                </a:lnTo>
+                <a:lnTo>
+                  <a:pt x="719287" y="195145"/>
+                </a:lnTo>
+                <a:lnTo>
+                  <a:pt x="736413" y="176016"/>
+                </a:lnTo>
+                <a:lnTo>
+                  <a:pt x="753538" y="157882"/>
+                </a:lnTo>
+                <a:lnTo>
+                  <a:pt x="770664" y="140747"/>
+                </a:lnTo>
+                <a:lnTo>
+                  <a:pt x="787790" y="124611"/>
+                </a:lnTo>
+                <a:lnTo>
+                  <a:pt x="804916" y="109476"/>
+                </a:lnTo>
+                <a:lnTo>
+                  <a:pt x="822042" y="95342"/>
+                </a:lnTo>
+                <a:lnTo>
+                  <a:pt x="839168" y="82206"/>
+                </a:lnTo>
+                <a:lnTo>
+                  <a:pt x="856294" y="70067"/>
+                </a:lnTo>
+                <a:lnTo>
+                  <a:pt x="873420" y="58921"/>
+                </a:lnTo>
+                <a:lnTo>
+                  <a:pt x="890546" y="48765"/>
+                </a:lnTo>
+                <a:lnTo>
+                  <a:pt x="907671" y="39592"/>
+                </a:lnTo>
+                <a:lnTo>
+                  <a:pt x="924797" y="31397"/>
+                </a:lnTo>
+                <a:lnTo>
+                  <a:pt x="941923" y="24173"/>
+                </a:lnTo>
+                <a:lnTo>
+                  <a:pt x="959049" y="17911"/>
+                </a:lnTo>
+                <a:lnTo>
+                  <a:pt x="976175" y="12603"/>
+                </a:lnTo>
+                <a:lnTo>
+                  <a:pt x="993301" y="8238"/>
+                </a:lnTo>
+                <a:lnTo>
+                  <a:pt x="1010427" y="4808"/>
+                </a:lnTo>
+                <a:lnTo>
+                  <a:pt x="1027553" y="2299"/>
+                </a:lnTo>
+                <a:lnTo>
+                  <a:pt x="1044679" y="701"/>
+                </a:lnTo>
+                <a:lnTo>
+                  <a:pt x="1061804" y="0"/>
+                </a:lnTo>
+                <a:lnTo>
+                  <a:pt x="1078930" y="182"/>
+                </a:lnTo>
+                <a:lnTo>
+                  <a:pt x="1096056" y="1234"/>
+                </a:lnTo>
+                <a:lnTo>
+                  <a:pt x="1113182" y="3140"/>
+                </a:lnTo>
+                <a:lnTo>
+                  <a:pt x="1130308" y="5885"/>
+                </a:lnTo>
+                <a:lnTo>
+                  <a:pt x="1147434" y="9453"/>
+                </a:lnTo>
+                <a:lnTo>
+                  <a:pt x="1164560" y="13826"/>
+                </a:lnTo>
+                <a:lnTo>
+                  <a:pt x="1181686" y="18989"/>
+                </a:lnTo>
+                <a:lnTo>
+                  <a:pt x="1198812" y="24923"/>
+                </a:lnTo>
+                <a:lnTo>
+                  <a:pt x="1215937" y="31609"/>
+                </a:lnTo>
+                <a:lnTo>
+                  <a:pt x="1233063" y="39030"/>
+                </a:lnTo>
+                <a:lnTo>
+                  <a:pt x="1250189" y="47165"/>
+                </a:lnTo>
+                <a:lnTo>
+                  <a:pt x="1267315" y="55996"/>
+                </a:lnTo>
+                <a:lnTo>
+                  <a:pt x="1284441" y="65503"/>
+                </a:lnTo>
+                <a:lnTo>
+                  <a:pt x="1301567" y="75666"/>
+                </a:lnTo>
+                <a:lnTo>
+                  <a:pt x="1318693" y="86463"/>
+                </a:lnTo>
+                <a:lnTo>
+                  <a:pt x="1335819" y="97875"/>
+                </a:lnTo>
+                <a:lnTo>
+                  <a:pt x="1352945" y="109881"/>
+                </a:lnTo>
+                <a:lnTo>
+                  <a:pt x="1370070" y="122460"/>
+                </a:lnTo>
+                <a:lnTo>
+                  <a:pt x="1387196" y="135590"/>
+                </a:lnTo>
+                <a:lnTo>
+                  <a:pt x="1404322" y="149249"/>
+                </a:lnTo>
+                <a:lnTo>
+                  <a:pt x="1421448" y="163418"/>
+                </a:lnTo>
+                <a:lnTo>
+                  <a:pt x="1438574" y="178073"/>
+                </a:lnTo>
+                <a:lnTo>
+                  <a:pt x="1455700" y="193193"/>
+                </a:lnTo>
+                <a:lnTo>
+                  <a:pt x="1472826" y="208758"/>
+                </a:lnTo>
+                <a:lnTo>
+                  <a:pt x="1489952" y="224745"/>
+                </a:lnTo>
+                <a:lnTo>
+                  <a:pt x="1507077" y="241132"/>
+                </a:lnTo>
+                <a:lnTo>
+                  <a:pt x="1524203" y="257899"/>
+                </a:lnTo>
+                <a:lnTo>
+                  <a:pt x="1541329" y="275023"/>
+                </a:lnTo>
+                <a:lnTo>
+                  <a:pt x="1558455" y="292485"/>
+                </a:lnTo>
+                <a:lnTo>
+                  <a:pt x="1575581" y="310261"/>
+                </a:lnTo>
+                <a:lnTo>
+                  <a:pt x="1592707" y="328333"/>
+                </a:lnTo>
+                <a:lnTo>
+                  <a:pt x="1609833" y="346678"/>
+                </a:lnTo>
+                <a:lnTo>
+                  <a:pt x="1626959" y="365276"/>
+                </a:lnTo>
+                <a:lnTo>
+                  <a:pt x="1644085" y="384108"/>
+                </a:lnTo>
+                <a:lnTo>
+                  <a:pt x="1661210" y="403152"/>
+                </a:lnTo>
+                <a:lnTo>
+                  <a:pt x="1678336" y="422390"/>
+                </a:lnTo>
+                <a:lnTo>
+                  <a:pt x="1695462" y="441802"/>
+                </a:lnTo>
+                <a:lnTo>
+                  <a:pt x="1712588" y="461368"/>
+                </a:lnTo>
+                <a:lnTo>
+                  <a:pt x="1729714" y="481069"/>
+                </a:lnTo>
+                <a:lnTo>
+                  <a:pt x="1746840" y="500888"/>
+                </a:lnTo>
+                <a:lnTo>
+                  <a:pt x="1763966" y="520806"/>
+                </a:lnTo>
+                <a:lnTo>
+                  <a:pt x="1781092" y="540806"/>
+                </a:lnTo>
+                <a:lnTo>
+                  <a:pt x="1798218" y="560869"/>
+                </a:lnTo>
+                <a:lnTo>
+                  <a:pt x="1815343" y="580979"/>
+                </a:lnTo>
+                <a:lnTo>
+                  <a:pt x="1832469" y="601119"/>
+                </a:lnTo>
+                <a:lnTo>
+                  <a:pt x="1849595" y="621274"/>
+                </a:lnTo>
+                <a:lnTo>
+                  <a:pt x="1866721" y="641426"/>
+                </a:lnTo>
+                <a:lnTo>
+                  <a:pt x="1883847" y="661562"/>
+                </a:lnTo>
+                <a:lnTo>
+                  <a:pt x="1900973" y="681666"/>
+                </a:lnTo>
+                <a:lnTo>
+                  <a:pt x="1918099" y="701724"/>
+                </a:lnTo>
+                <a:lnTo>
+                  <a:pt x="1935225" y="721722"/>
+                </a:lnTo>
+                <a:lnTo>
+                  <a:pt x="1952351" y="741645"/>
+                </a:lnTo>
+                <a:lnTo>
+                  <a:pt x="1969476" y="761482"/>
+                </a:lnTo>
+                <a:lnTo>
+                  <a:pt x="1986602" y="781220"/>
+                </a:lnTo>
+                <a:lnTo>
+                  <a:pt x="2003728" y="800846"/>
+                </a:lnTo>
+                <a:lnTo>
+                  <a:pt x="2020854" y="820349"/>
+                </a:lnTo>
+                <a:lnTo>
+                  <a:pt x="2037980" y="839718"/>
+                </a:lnTo>
+                <a:lnTo>
+                  <a:pt x="2055106" y="858941"/>
+                </a:lnTo>
+                <a:lnTo>
+                  <a:pt x="2072232" y="878009"/>
+                </a:lnTo>
+                <a:lnTo>
+                  <a:pt x="2089358" y="896913"/>
+                </a:lnTo>
+                <a:lnTo>
+                  <a:pt x="2106484" y="915641"/>
+                </a:lnTo>
+                <a:lnTo>
+                  <a:pt x="2123609" y="934187"/>
+                </a:lnTo>
+                <a:lnTo>
+                  <a:pt x="2140735" y="952541"/>
+                </a:lnTo>
+                <a:lnTo>
+                  <a:pt x="2157861" y="970696"/>
+                </a:lnTo>
+                <a:lnTo>
+                  <a:pt x="2174987" y="988644"/>
+                </a:lnTo>
+                <a:lnTo>
+                  <a:pt x="2192113" y="1006377"/>
+                </a:lnTo>
+                <a:lnTo>
+                  <a:pt x="2209239" y="1023891"/>
+                </a:lnTo>
+                <a:lnTo>
+                  <a:pt x="2226365" y="1041177"/>
+                </a:lnTo>
+                <a:lnTo>
+                  <a:pt x="2243491" y="1058232"/>
+                </a:lnTo>
+                <a:lnTo>
+                  <a:pt x="2260616" y="1075048"/>
+                </a:lnTo>
+                <a:lnTo>
+                  <a:pt x="2277742" y="1091622"/>
+                </a:lnTo>
+                <a:lnTo>
+                  <a:pt x="2294868" y="1107950"/>
+                </a:lnTo>
+                <a:lnTo>
+                  <a:pt x="2311994" y="1124026"/>
+                </a:lnTo>
+                <a:lnTo>
+                  <a:pt x="2329120" y="1139847"/>
+                </a:lnTo>
+                <a:lnTo>
+                  <a:pt x="2346246" y="1155411"/>
+                </a:lnTo>
+                <a:lnTo>
+                  <a:pt x="2363372" y="1170714"/>
+                </a:lnTo>
+                <a:lnTo>
+                  <a:pt x="2380498" y="1185753"/>
+                </a:lnTo>
+                <a:lnTo>
+                  <a:pt x="2397624" y="1200527"/>
+                </a:lnTo>
+                <a:lnTo>
+                  <a:pt x="2414749" y="1215033"/>
+                </a:lnTo>
+                <a:lnTo>
+                  <a:pt x="2431875" y="1229271"/>
+                </a:lnTo>
+                <a:lnTo>
+                  <a:pt x="2449001" y="1243238"/>
+                </a:lnTo>
+                <a:lnTo>
+                  <a:pt x="2466127" y="1256934"/>
+                </a:lnTo>
+                <a:lnTo>
+                  <a:pt x="2483253" y="1270359"/>
+                </a:lnTo>
+                <a:lnTo>
+                  <a:pt x="2500379" y="1283512"/>
+                </a:lnTo>
+                <a:lnTo>
+                  <a:pt x="2517505" y="1296393"/>
+                </a:lnTo>
+                <a:lnTo>
+                  <a:pt x="2534631" y="1309003"/>
+                </a:lnTo>
+                <a:lnTo>
+                  <a:pt x="2551757" y="1321342"/>
+                </a:lnTo>
+                <a:lnTo>
+                  <a:pt x="2568882" y="1333411"/>
+                </a:lnTo>
+                <a:lnTo>
+                  <a:pt x="2586008" y="1345210"/>
+                </a:lnTo>
+                <a:lnTo>
+                  <a:pt x="2603134" y="1356742"/>
+                </a:lnTo>
+                <a:lnTo>
+                  <a:pt x="2620260" y="1368008"/>
+                </a:lnTo>
+                <a:lnTo>
+                  <a:pt x="2637386" y="1379009"/>
+                </a:lnTo>
+                <a:lnTo>
+                  <a:pt x="2654512" y="1389748"/>
+                </a:lnTo>
+                <a:lnTo>
+                  <a:pt x="2671638" y="1400226"/>
+                </a:lnTo>
+                <a:lnTo>
+                  <a:pt x="2688764" y="1410446"/>
+                </a:lnTo>
+                <a:lnTo>
+                  <a:pt x="2705890" y="1420410"/>
+                </a:lnTo>
+                <a:lnTo>
+                  <a:pt x="2723015" y="1430121"/>
+                </a:lnTo>
+                <a:lnTo>
+                  <a:pt x="2740141" y="1439582"/>
+                </a:lnTo>
+                <a:lnTo>
+                  <a:pt x="2757267" y="1448795"/>
+                </a:lnTo>
+                <a:lnTo>
+                  <a:pt x="2774393" y="1457764"/>
+                </a:lnTo>
+                <a:lnTo>
+                  <a:pt x="2791519" y="1466492"/>
+                </a:lnTo>
+                <a:lnTo>
+                  <a:pt x="2808645" y="1474982"/>
+                </a:lnTo>
+                <a:lnTo>
+                  <a:pt x="2825771" y="1483237"/>
+                </a:lnTo>
+                <a:lnTo>
+                  <a:pt x="2842897" y="1491262"/>
+                </a:lnTo>
+                <a:lnTo>
+                  <a:pt x="2860023" y="1499058"/>
+                </a:lnTo>
+                <a:lnTo>
+                  <a:pt x="2877148" y="1506631"/>
+                </a:lnTo>
+                <a:lnTo>
+                  <a:pt x="2894274" y="1513984"/>
+                </a:lnTo>
+                <a:lnTo>
+                  <a:pt x="2911400" y="1521121"/>
+                </a:lnTo>
+                <a:lnTo>
+                  <a:pt x="2928526" y="1528045"/>
+                </a:lnTo>
+                <a:lnTo>
+                  <a:pt x="2945652" y="1534761"/>
+                </a:lnTo>
+                <a:lnTo>
+                  <a:pt x="2962778" y="1541272"/>
+                </a:lnTo>
+                <a:lnTo>
+                  <a:pt x="2979904" y="1547582"/>
+                </a:lnTo>
+                <a:lnTo>
+                  <a:pt x="2997030" y="1553696"/>
+                </a:lnTo>
+                <a:lnTo>
+                  <a:pt x="3014155" y="1559617"/>
+                </a:lnTo>
+                <a:lnTo>
+                  <a:pt x="3031281" y="1565349"/>
+                </a:lnTo>
+                <a:lnTo>
+                  <a:pt x="3048407" y="1570897"/>
+                </a:lnTo>
+                <a:lnTo>
+                  <a:pt x="3065533" y="1576265"/>
+                </a:lnTo>
+                <a:lnTo>
+                  <a:pt x="3082659" y="1581456"/>
+                </a:lnTo>
+                <a:lnTo>
+                  <a:pt x="3099785" y="1586475"/>
+                </a:lnTo>
+                <a:lnTo>
+                  <a:pt x="3116911" y="1591325"/>
+                </a:lnTo>
+                <a:lnTo>
+                  <a:pt x="3134037" y="1596012"/>
+                </a:lnTo>
+                <a:lnTo>
+                  <a:pt x="3151163" y="1600538"/>
+                </a:lnTo>
+                <a:lnTo>
+                  <a:pt x="3168288" y="1604907"/>
+                </a:lnTo>
+                <a:lnTo>
+                  <a:pt x="3185414" y="1609124"/>
+                </a:lnTo>
+                <a:lnTo>
+                  <a:pt x="3202540" y="1613193"/>
+                </a:lnTo>
+                <a:lnTo>
+                  <a:pt x="3219666" y="1617118"/>
+                </a:lnTo>
+                <a:lnTo>
+                  <a:pt x="3236792" y="1620901"/>
+                </a:lnTo>
+                <a:lnTo>
+                  <a:pt x="3253918" y="1624548"/>
+                </a:lnTo>
+                <a:lnTo>
+                  <a:pt x="3271044" y="1628062"/>
+                </a:lnTo>
+                <a:lnTo>
+                  <a:pt x="3288170" y="1631447"/>
+                </a:lnTo>
+                <a:lnTo>
+                  <a:pt x="3305296" y="1634706"/>
+                </a:lnTo>
+                <a:lnTo>
+                  <a:pt x="3322421" y="1637842"/>
+                </a:lnTo>
+                <a:lnTo>
+                  <a:pt x="3339547" y="1640861"/>
+                </a:lnTo>
+                <a:lnTo>
+                  <a:pt x="3356673" y="1643764"/>
+                </a:lnTo>
+                <a:lnTo>
+                  <a:pt x="3373799" y="1646556"/>
+                </a:lnTo>
+                <a:lnTo>
+                  <a:pt x="3390925" y="1649240"/>
+                </a:lnTo>
+                <a:lnTo>
+                  <a:pt x="3408051" y="1651818"/>
+                </a:lnTo>
+                <a:lnTo>
+                  <a:pt x="3425177" y="1654296"/>
+                </a:lnTo>
+                <a:lnTo>
+                  <a:pt x="3442303" y="1656675"/>
+                </a:lnTo>
+                <a:lnTo>
+                  <a:pt x="3459429" y="1658959"/>
+                </a:lnTo>
+                <a:lnTo>
+                  <a:pt x="3476554" y="1661152"/>
+                </a:lnTo>
+                <a:lnTo>
+                  <a:pt x="3493680" y="1663255"/>
+                </a:lnTo>
+                <a:lnTo>
+                  <a:pt x="3510806" y="1665272"/>
+                </a:lnTo>
+                <a:lnTo>
+                  <a:pt x="3527932" y="1667206"/>
+                </a:lnTo>
+                <a:lnTo>
+                  <a:pt x="3545058" y="1669060"/>
+                </a:lnTo>
+                <a:lnTo>
+                  <a:pt x="3562184" y="1670836"/>
+                </a:lnTo>
+                <a:lnTo>
+                  <a:pt x="3579310" y="1672537"/>
+                </a:lnTo>
+                <a:lnTo>
+                  <a:pt x="3596436" y="1674166"/>
+                </a:lnTo>
+                <a:lnTo>
+                  <a:pt x="3613562" y="1675726"/>
+                </a:lnTo>
+                <a:lnTo>
+                  <a:pt x="3630687" y="1677218"/>
+                </a:lnTo>
+                <a:lnTo>
+                  <a:pt x="3647813" y="1678646"/>
+                </a:lnTo>
+                <a:lnTo>
+                  <a:pt x="3664939" y="1680011"/>
+                </a:lnTo>
+                <a:lnTo>
+                  <a:pt x="3682065" y="1681317"/>
+                </a:lnTo>
+                <a:lnTo>
+                  <a:pt x="3699191" y="1682565"/>
+                </a:lnTo>
+                <a:lnTo>
+                  <a:pt x="3716317" y="1683757"/>
+                </a:lnTo>
+                <a:lnTo>
+                  <a:pt x="3733443" y="1684895"/>
+                </a:lnTo>
+                <a:lnTo>
+                  <a:pt x="3750569" y="1685983"/>
+                </a:lnTo>
+                <a:lnTo>
+                  <a:pt x="3767694" y="1687020"/>
+                </a:lnTo>
+                <a:lnTo>
+                  <a:pt x="3784820" y="1688011"/>
+                </a:lnTo>
+                <a:lnTo>
+                  <a:pt x="3801946" y="1688956"/>
+                </a:lnTo>
+                <a:lnTo>
+                  <a:pt x="3819072" y="1689857"/>
+                </a:lnTo>
+                <a:lnTo>
+                  <a:pt x="3836198" y="1690716"/>
+                </a:lnTo>
+                <a:lnTo>
+                  <a:pt x="3853324" y="1691534"/>
+                </a:lnTo>
+                <a:lnTo>
+                  <a:pt x="3870450" y="1692314"/>
+                </a:lnTo>
+                <a:lnTo>
+                  <a:pt x="3887576" y="1693057"/>
+                </a:lnTo>
+                <a:lnTo>
+                  <a:pt x="3904702" y="1693765"/>
+                </a:lnTo>
+                <a:lnTo>
+                  <a:pt x="3921827" y="1694438"/>
+                </a:lnTo>
+                <a:lnTo>
+                  <a:pt x="3938953" y="1695079"/>
+                </a:lnTo>
+                <a:lnTo>
+                  <a:pt x="3956079" y="1695689"/>
+                </a:lnTo>
+                <a:lnTo>
+                  <a:pt x="3973205" y="1696269"/>
+                </a:lnTo>
+                <a:lnTo>
+                  <a:pt x="3990331" y="1696820"/>
+                </a:lnTo>
+                <a:lnTo>
+                  <a:pt x="4007457" y="1697344"/>
+                </a:lnTo>
+                <a:lnTo>
+                  <a:pt x="4024583" y="1697842"/>
+                </a:lnTo>
+                <a:lnTo>
+                  <a:pt x="4041709" y="1698315"/>
+                </a:lnTo>
+                <a:lnTo>
+                  <a:pt x="4058835" y="1698764"/>
+                </a:lnTo>
+                <a:lnTo>
+                  <a:pt x="4075960" y="1699190"/>
+                </a:lnTo>
+                <a:lnTo>
+                  <a:pt x="4093086" y="1699595"/>
+                </a:lnTo>
+                <a:lnTo>
+                  <a:pt x="4110212" y="1699979"/>
+                </a:lnTo>
+                <a:lnTo>
+                  <a:pt x="4127338" y="1700343"/>
+                </a:lnTo>
+                <a:lnTo>
+                  <a:pt x="4144464" y="1700688"/>
+                </a:lnTo>
+                <a:lnTo>
+                  <a:pt x="4161590" y="1701015"/>
+                </a:lnTo>
+                <a:lnTo>
+                  <a:pt x="4178716" y="1701326"/>
+                </a:lnTo>
+                <a:lnTo>
+                  <a:pt x="4195842" y="1701619"/>
+                </a:lnTo>
+                <a:lnTo>
+                  <a:pt x="4212968" y="1701898"/>
+                </a:lnTo>
+                <a:lnTo>
+                  <a:pt x="4230093" y="1702161"/>
+                </a:lnTo>
+                <a:lnTo>
+                  <a:pt x="4247219" y="1702410"/>
+                </a:lnTo>
+                <a:lnTo>
+                  <a:pt x="4264345" y="1702646"/>
+                </a:lnTo>
+                <a:lnTo>
+                  <a:pt x="4281471" y="1702869"/>
+                </a:lnTo>
+                <a:lnTo>
+                  <a:pt x="4298597" y="1703080"/>
+                </a:lnTo>
+                <a:lnTo>
+                  <a:pt x="4315723" y="1703280"/>
+                </a:lnTo>
+                <a:lnTo>
+                  <a:pt x="4332849" y="1703468"/>
+                </a:lnTo>
+                <a:lnTo>
+                  <a:pt x="4349975" y="1703646"/>
+                </a:lnTo>
+                <a:lnTo>
+                  <a:pt x="4367101" y="1703815"/>
+                </a:lnTo>
+                <a:lnTo>
+                  <a:pt x="4384226" y="1703973"/>
+                </a:lnTo>
+                <a:lnTo>
+                  <a:pt x="4401352" y="1704123"/>
+                </a:lnTo>
+                <a:lnTo>
+                  <a:pt x="4418478" y="1704265"/>
+                </a:lnTo>
+                <a:lnTo>
+                  <a:pt x="4435604" y="1704398"/>
+                </a:lnTo>
+                <a:lnTo>
+                  <a:pt x="4452730" y="1704524"/>
+                </a:lnTo>
+                <a:lnTo>
+                  <a:pt x="4469856" y="1704643"/>
+                </a:lnTo>
+                <a:lnTo>
+                  <a:pt x="4486982" y="1704755"/>
+                </a:lnTo>
+                <a:lnTo>
+                  <a:pt x="4504108" y="1704860"/>
+                </a:lnTo>
+                <a:lnTo>
+                  <a:pt x="4521233" y="1704960"/>
+                </a:lnTo>
+                <a:lnTo>
+                  <a:pt x="4538359" y="1705053"/>
+                </a:lnTo>
+                <a:lnTo>
+                  <a:pt x="4555485" y="1705141"/>
+                </a:lnTo>
+                <a:lnTo>
+                  <a:pt x="4572611" y="1705224"/>
+                </a:lnTo>
+                <a:lnTo>
+                  <a:pt x="4589737" y="1705302"/>
+                </a:lnTo>
+                <a:lnTo>
+                  <a:pt x="4606863" y="1705375"/>
+                </a:lnTo>
+                <a:lnTo>
+                  <a:pt x="4623989" y="1705444"/>
+                </a:lnTo>
+                <a:lnTo>
+                  <a:pt x="4641115" y="1705509"/>
+                </a:lnTo>
+                <a:lnTo>
+                  <a:pt x="4658241" y="1705570"/>
+                </a:lnTo>
+                <a:lnTo>
+                  <a:pt x="4675366" y="1705627"/>
+                </a:lnTo>
+                <a:lnTo>
+                  <a:pt x="4692492" y="1705681"/>
+                </a:lnTo>
+                <a:lnTo>
+                  <a:pt x="4709618" y="1705732"/>
+                </a:lnTo>
+                <a:lnTo>
+                  <a:pt x="4726744" y="1705779"/>
+                </a:lnTo>
+                <a:lnTo>
+                  <a:pt x="4743870" y="1705824"/>
+                </a:lnTo>
+                <a:lnTo>
+                  <a:pt x="4760996" y="1705865"/>
+                </a:lnTo>
+                <a:lnTo>
+                  <a:pt x="4778122" y="1705905"/>
+                </a:lnTo>
+                <a:lnTo>
+                  <a:pt x="4795248" y="1705941"/>
+                </a:lnTo>
+                <a:lnTo>
+                  <a:pt x="4812374" y="1705976"/>
+                </a:lnTo>
+                <a:lnTo>
+                  <a:pt x="4829499" y="1706008"/>
+                </a:lnTo>
+                <a:lnTo>
+                  <a:pt x="4846625" y="1706038"/>
+                </a:lnTo>
+                <a:lnTo>
+                  <a:pt x="4863751" y="1706066"/>
+                </a:lnTo>
+                <a:lnTo>
+                  <a:pt x="4880877" y="1706093"/>
+                </a:lnTo>
+                <a:lnTo>
+                  <a:pt x="4898003" y="1706118"/>
+                </a:lnTo>
+                <a:lnTo>
+                  <a:pt x="4915129" y="1706141"/>
+                </a:lnTo>
+                <a:lnTo>
+                  <a:pt x="4932255" y="1706163"/>
+                </a:lnTo>
+                <a:lnTo>
+                  <a:pt x="4949381" y="1706183"/>
+                </a:lnTo>
+                <a:lnTo>
+                  <a:pt x="4966507" y="1706202"/>
+                </a:lnTo>
+                <a:lnTo>
+                  <a:pt x="4983632" y="1706220"/>
+                </a:lnTo>
+                <a:lnTo>
+                  <a:pt x="5000758" y="1706236"/>
+                </a:lnTo>
+                <a:lnTo>
+                  <a:pt x="5017884" y="1706252"/>
+                </a:lnTo>
+                <a:lnTo>
+                  <a:pt x="5035010" y="1706266"/>
+                </a:lnTo>
+                <a:lnTo>
+                  <a:pt x="5052136" y="1706280"/>
+                </a:lnTo>
+                <a:lnTo>
+                  <a:pt x="5069262" y="1706292"/>
+                </a:lnTo>
+                <a:lnTo>
+                  <a:pt x="5086388" y="1706304"/>
+                </a:lnTo>
+                <a:lnTo>
+                  <a:pt x="5103514" y="1706315"/>
+                </a:lnTo>
+                <a:lnTo>
+                  <a:pt x="5120640" y="1706325"/>
+                </a:lnTo>
+                <a:lnTo>
+                  <a:pt x="5120640" y="1706460"/>
+                </a:lnTo>
+                <a:lnTo>
+                  <a:pt x="5103514" y="1706460"/>
+                </a:lnTo>
+                <a:lnTo>
+                  <a:pt x="5086388" y="1706460"/>
+                </a:lnTo>
+                <a:lnTo>
+                  <a:pt x="5069262" y="1706460"/>
+                </a:lnTo>
+                <a:lnTo>
+                  <a:pt x="5052136" y="1706460"/>
+                </a:lnTo>
+                <a:lnTo>
+                  <a:pt x="5035010" y="1706460"/>
+                </a:lnTo>
+                <a:lnTo>
+                  <a:pt x="5017884" y="1706460"/>
+                </a:lnTo>
+                <a:lnTo>
+                  <a:pt x="5000758" y="1706460"/>
+                </a:lnTo>
+                <a:lnTo>
+                  <a:pt x="4983632" y="1706460"/>
+                </a:lnTo>
+                <a:lnTo>
+                  <a:pt x="4966507" y="1706460"/>
+                </a:lnTo>
+                <a:lnTo>
+                  <a:pt x="4949381" y="1706460"/>
+                </a:lnTo>
+                <a:lnTo>
+                  <a:pt x="4932255" y="1706460"/>
+                </a:lnTo>
+                <a:lnTo>
+                  <a:pt x="4915129" y="1706460"/>
+                </a:lnTo>
+                <a:lnTo>
+                  <a:pt x="4898003" y="1706460"/>
+                </a:lnTo>
+                <a:lnTo>
+                  <a:pt x="4880877" y="1706460"/>
+                </a:lnTo>
+                <a:lnTo>
+                  <a:pt x="4863751" y="1706460"/>
+                </a:lnTo>
+                <a:lnTo>
+                  <a:pt x="4846625" y="1706460"/>
+                </a:lnTo>
+                <a:lnTo>
+                  <a:pt x="4829499" y="1706460"/>
+                </a:lnTo>
+                <a:lnTo>
+                  <a:pt x="4812374" y="1706460"/>
+                </a:lnTo>
+                <a:lnTo>
+                  <a:pt x="4795248" y="1706460"/>
+                </a:lnTo>
+                <a:lnTo>
+                  <a:pt x="4778122" y="1706460"/>
+                </a:lnTo>
+                <a:lnTo>
+                  <a:pt x="4760996" y="1706460"/>
+                </a:lnTo>
+                <a:lnTo>
+                  <a:pt x="4743870" y="1706460"/>
+                </a:lnTo>
+                <a:lnTo>
+                  <a:pt x="4726744" y="1706460"/>
+                </a:lnTo>
+                <a:lnTo>
+                  <a:pt x="4709618" y="1706460"/>
+                </a:lnTo>
+                <a:lnTo>
+                  <a:pt x="4692492" y="1706460"/>
+                </a:lnTo>
+                <a:lnTo>
+                  <a:pt x="4675366" y="1706460"/>
+                </a:lnTo>
+                <a:lnTo>
+                  <a:pt x="4658241" y="1706460"/>
+                </a:lnTo>
+                <a:lnTo>
+                  <a:pt x="4641115" y="1706460"/>
+                </a:lnTo>
+                <a:lnTo>
+                  <a:pt x="4623989" y="1706460"/>
+                </a:lnTo>
+                <a:lnTo>
+                  <a:pt x="4606863" y="1706460"/>
+                </a:lnTo>
+                <a:lnTo>
+                  <a:pt x="4589737" y="1706460"/>
+                </a:lnTo>
+                <a:lnTo>
+                  <a:pt x="4572611" y="1706460"/>
+                </a:lnTo>
+                <a:lnTo>
+                  <a:pt x="4555485" y="1706460"/>
+                </a:lnTo>
+                <a:lnTo>
+                  <a:pt x="4538359" y="1706460"/>
+                </a:lnTo>
+                <a:lnTo>
+                  <a:pt x="4521233" y="1706460"/>
+                </a:lnTo>
+                <a:lnTo>
+                  <a:pt x="4504108" y="1706460"/>
+                </a:lnTo>
+                <a:lnTo>
+                  <a:pt x="4486982" y="1706460"/>
+                </a:lnTo>
+                <a:lnTo>
+                  <a:pt x="4469856" y="1706460"/>
+                </a:lnTo>
+                <a:lnTo>
+                  <a:pt x="4452730" y="1706460"/>
+                </a:lnTo>
+                <a:lnTo>
+                  <a:pt x="4435604" y="1706460"/>
+                </a:lnTo>
+                <a:lnTo>
+                  <a:pt x="4418478" y="1706460"/>
+                </a:lnTo>
+                <a:lnTo>
+                  <a:pt x="4401352" y="1706460"/>
+                </a:lnTo>
+                <a:lnTo>
+                  <a:pt x="4384226" y="1706460"/>
+                </a:lnTo>
+                <a:lnTo>
+                  <a:pt x="4367101" y="1706460"/>
+                </a:lnTo>
+                <a:lnTo>
+                  <a:pt x="4349975" y="1706460"/>
+                </a:lnTo>
+                <a:lnTo>
+                  <a:pt x="4332849" y="1706460"/>
+                </a:lnTo>
+                <a:lnTo>
+                  <a:pt x="4315723" y="1706460"/>
+                </a:lnTo>
+                <a:lnTo>
+                  <a:pt x="4298597" y="1706460"/>
+                </a:lnTo>
+                <a:lnTo>
+                  <a:pt x="4281471" y="1706460"/>
+                </a:lnTo>
+                <a:lnTo>
+                  <a:pt x="4264345" y="1706460"/>
+                </a:lnTo>
+                <a:lnTo>
+                  <a:pt x="4247219" y="1706460"/>
+                </a:lnTo>
+                <a:lnTo>
+                  <a:pt x="4230093" y="1706460"/>
+                </a:lnTo>
+                <a:lnTo>
+                  <a:pt x="4212968" y="1706460"/>
+                </a:lnTo>
+                <a:lnTo>
+                  <a:pt x="4195842" y="1706460"/>
+                </a:lnTo>
+                <a:lnTo>
+                  <a:pt x="4178716" y="1706460"/>
+                </a:lnTo>
+                <a:lnTo>
+                  <a:pt x="4161590" y="1706460"/>
+                </a:lnTo>
+                <a:lnTo>
+                  <a:pt x="4144464" y="1706460"/>
+                </a:lnTo>
+                <a:lnTo>
+                  <a:pt x="4127338" y="1706460"/>
+                </a:lnTo>
+                <a:lnTo>
+                  <a:pt x="4110212" y="1706460"/>
+                </a:lnTo>
+                <a:lnTo>
+                  <a:pt x="4093086" y="1706460"/>
+                </a:lnTo>
+                <a:lnTo>
+                  <a:pt x="4075960" y="1706460"/>
+                </a:lnTo>
+                <a:lnTo>
+                  <a:pt x="4058835" y="1706460"/>
+                </a:lnTo>
+                <a:lnTo>
+                  <a:pt x="4041709" y="1706460"/>
+                </a:lnTo>
+                <a:lnTo>
+                  <a:pt x="4024583" y="1706460"/>
+                </a:lnTo>
+                <a:lnTo>
+                  <a:pt x="4007457" y="1706460"/>
+                </a:lnTo>
+                <a:lnTo>
+                  <a:pt x="3990331" y="1706460"/>
+                </a:lnTo>
+                <a:lnTo>
+                  <a:pt x="3973205" y="1706460"/>
+                </a:lnTo>
+                <a:lnTo>
+                  <a:pt x="3956079" y="1706460"/>
+                </a:lnTo>
+                <a:lnTo>
+                  <a:pt x="3938953" y="1706460"/>
+                </a:lnTo>
+                <a:lnTo>
+                  <a:pt x="3921827" y="1706460"/>
+                </a:lnTo>
+                <a:lnTo>
+                  <a:pt x="3904702" y="1706460"/>
+                </a:lnTo>
+                <a:lnTo>
+                  <a:pt x="3887576" y="1706460"/>
+                </a:lnTo>
+                <a:lnTo>
+                  <a:pt x="3870450" y="1706460"/>
+                </a:lnTo>
+                <a:lnTo>
+                  <a:pt x="3853324" y="1706460"/>
+                </a:lnTo>
+                <a:lnTo>
+                  <a:pt x="3836198" y="1706460"/>
+                </a:lnTo>
+                <a:lnTo>
+                  <a:pt x="3819072" y="1706460"/>
+                </a:lnTo>
+                <a:lnTo>
+                  <a:pt x="3801946" y="1706460"/>
+                </a:lnTo>
+                <a:lnTo>
+                  <a:pt x="3784820" y="1706460"/>
+                </a:lnTo>
+                <a:lnTo>
+                  <a:pt x="3767694" y="1706460"/>
+                </a:lnTo>
+                <a:lnTo>
+                  <a:pt x="3750569" y="1706460"/>
+                </a:lnTo>
+                <a:lnTo>
+                  <a:pt x="3733443" y="1706460"/>
+                </a:lnTo>
+                <a:lnTo>
+                  <a:pt x="3716317" y="1706460"/>
+                </a:lnTo>
+                <a:lnTo>
+                  <a:pt x="3699191" y="1706460"/>
+                </a:lnTo>
+                <a:lnTo>
+                  <a:pt x="3682065" y="1706460"/>
+                </a:lnTo>
+                <a:lnTo>
+                  <a:pt x="3664939" y="1706460"/>
+                </a:lnTo>
+                <a:lnTo>
+                  <a:pt x="3647813" y="1706460"/>
+                </a:lnTo>
+                <a:lnTo>
+                  <a:pt x="3630687" y="1706460"/>
+                </a:lnTo>
+                <a:lnTo>
+                  <a:pt x="3613562" y="1706460"/>
+                </a:lnTo>
+                <a:lnTo>
+                  <a:pt x="3596436" y="1706460"/>
+                </a:lnTo>
+                <a:lnTo>
+                  <a:pt x="3579310" y="1706460"/>
+                </a:lnTo>
+                <a:lnTo>
+                  <a:pt x="3562184" y="1706460"/>
+                </a:lnTo>
+                <a:lnTo>
+                  <a:pt x="3545058" y="1706460"/>
+                </a:lnTo>
+                <a:lnTo>
+                  <a:pt x="3527932" y="1706460"/>
+                </a:lnTo>
+                <a:lnTo>
+                  <a:pt x="3510806" y="1706460"/>
+                </a:lnTo>
+                <a:lnTo>
+                  <a:pt x="3493680" y="1706460"/>
+                </a:lnTo>
+                <a:lnTo>
+                  <a:pt x="3476554" y="1706460"/>
+                </a:lnTo>
+                <a:lnTo>
+                  <a:pt x="3459429" y="1706460"/>
+                </a:lnTo>
+                <a:lnTo>
+                  <a:pt x="3442303" y="1706460"/>
+                </a:lnTo>
+                <a:lnTo>
+                  <a:pt x="3425177" y="1706460"/>
+                </a:lnTo>
+                <a:lnTo>
+                  <a:pt x="3408051" y="1706460"/>
+                </a:lnTo>
+                <a:lnTo>
+                  <a:pt x="3390925" y="1706460"/>
+                </a:lnTo>
+                <a:lnTo>
+                  <a:pt x="3373799" y="1706460"/>
+                </a:lnTo>
+                <a:lnTo>
+                  <a:pt x="3356673" y="1706460"/>
+                </a:lnTo>
+                <a:lnTo>
+                  <a:pt x="3339547" y="1706460"/>
+                </a:lnTo>
+                <a:lnTo>
+                  <a:pt x="3322421" y="1706460"/>
+                </a:lnTo>
+                <a:lnTo>
+                  <a:pt x="3305296" y="1706460"/>
+                </a:lnTo>
+                <a:lnTo>
+                  <a:pt x="3288170" y="1706460"/>
+                </a:lnTo>
+                <a:lnTo>
+                  <a:pt x="3271044" y="1706460"/>
+                </a:lnTo>
+                <a:lnTo>
+                  <a:pt x="3253918" y="1706460"/>
+                </a:lnTo>
+                <a:lnTo>
+                  <a:pt x="3236792" y="1706460"/>
+                </a:lnTo>
+                <a:lnTo>
+                  <a:pt x="3219666" y="1706460"/>
+                </a:lnTo>
+                <a:lnTo>
+                  <a:pt x="3202540" y="1706460"/>
+                </a:lnTo>
+                <a:lnTo>
+                  <a:pt x="3185414" y="1706460"/>
+                </a:lnTo>
+                <a:lnTo>
+                  <a:pt x="3168288" y="1706460"/>
+                </a:lnTo>
+                <a:lnTo>
+                  <a:pt x="3151163" y="1706460"/>
+                </a:lnTo>
+                <a:lnTo>
+                  <a:pt x="3134037" y="1706460"/>
+                </a:lnTo>
+                <a:lnTo>
+                  <a:pt x="3116911" y="1706460"/>
+                </a:lnTo>
+                <a:lnTo>
+                  <a:pt x="3099785" y="1706460"/>
+                </a:lnTo>
+                <a:lnTo>
+                  <a:pt x="3082659" y="1706460"/>
+                </a:lnTo>
+                <a:lnTo>
+                  <a:pt x="3065533" y="1706460"/>
+                </a:lnTo>
+                <a:lnTo>
+                  <a:pt x="3048407" y="1706460"/>
+                </a:lnTo>
+                <a:lnTo>
+                  <a:pt x="3031281" y="1706460"/>
+                </a:lnTo>
+                <a:lnTo>
+                  <a:pt x="3014155" y="1706460"/>
+                </a:lnTo>
+                <a:lnTo>
+                  <a:pt x="2997030" y="1706460"/>
+                </a:lnTo>
+                <a:lnTo>
+                  <a:pt x="2979904" y="1706460"/>
+                </a:lnTo>
+                <a:lnTo>
+                  <a:pt x="2962778" y="1706460"/>
+                </a:lnTo>
+                <a:lnTo>
+                  <a:pt x="2945652" y="1706460"/>
+                </a:lnTo>
+                <a:lnTo>
+                  <a:pt x="2928526" y="1706460"/>
+                </a:lnTo>
+                <a:lnTo>
+                  <a:pt x="2911400" y="1706460"/>
+                </a:lnTo>
+                <a:lnTo>
+                  <a:pt x="2894274" y="1706460"/>
+                </a:lnTo>
+                <a:lnTo>
+                  <a:pt x="2877148" y="1706460"/>
+                </a:lnTo>
+                <a:lnTo>
+                  <a:pt x="2860023" y="1706460"/>
+                </a:lnTo>
+                <a:lnTo>
+                  <a:pt x="2842897" y="1706460"/>
+                </a:lnTo>
+                <a:lnTo>
+                  <a:pt x="2825771" y="1706460"/>
+                </a:lnTo>
+                <a:lnTo>
+                  <a:pt x="2808645" y="1706460"/>
+                </a:lnTo>
+                <a:lnTo>
+                  <a:pt x="2791519" y="1706460"/>
+                </a:lnTo>
+                <a:lnTo>
+                  <a:pt x="2774393" y="1706460"/>
+                </a:lnTo>
+                <a:lnTo>
+                  <a:pt x="2757267" y="1706460"/>
+                </a:lnTo>
+                <a:lnTo>
+                  <a:pt x="2740141" y="1706460"/>
+                </a:lnTo>
+                <a:lnTo>
+                  <a:pt x="2723015" y="1706460"/>
+                </a:lnTo>
+                <a:lnTo>
+                  <a:pt x="2705890" y="1706460"/>
+                </a:lnTo>
+                <a:lnTo>
+                  <a:pt x="2688764" y="1706460"/>
+                </a:lnTo>
+                <a:lnTo>
+                  <a:pt x="2671638" y="1706460"/>
+                </a:lnTo>
+                <a:lnTo>
+                  <a:pt x="2654512" y="1706460"/>
+                </a:lnTo>
+                <a:lnTo>
+                  <a:pt x="2637386" y="1706460"/>
+                </a:lnTo>
+                <a:lnTo>
+                  <a:pt x="2620260" y="1706460"/>
+                </a:lnTo>
+                <a:lnTo>
+                  <a:pt x="2603134" y="1706460"/>
+                </a:lnTo>
+                <a:lnTo>
+                  <a:pt x="2586008" y="1706460"/>
+                </a:lnTo>
+                <a:lnTo>
+                  <a:pt x="2568882" y="1706460"/>
+                </a:lnTo>
+                <a:lnTo>
+                  <a:pt x="2551757" y="1706460"/>
+                </a:lnTo>
+                <a:lnTo>
+                  <a:pt x="2534631" y="1706460"/>
+                </a:lnTo>
+                <a:lnTo>
+                  <a:pt x="2517505" y="1706460"/>
+                </a:lnTo>
+                <a:lnTo>
+                  <a:pt x="2500379" y="1706460"/>
+                </a:lnTo>
+                <a:lnTo>
+                  <a:pt x="2483253" y="1706460"/>
+                </a:lnTo>
+                <a:lnTo>
+                  <a:pt x="2466127" y="1706460"/>
+                </a:lnTo>
+                <a:lnTo>
+                  <a:pt x="2449001" y="1706460"/>
+                </a:lnTo>
+                <a:lnTo>
+                  <a:pt x="2431875" y="1706460"/>
+                </a:lnTo>
+                <a:lnTo>
+                  <a:pt x="2414749" y="1706460"/>
+                </a:lnTo>
+                <a:lnTo>
+                  <a:pt x="2397624" y="1706460"/>
+                </a:lnTo>
+                <a:lnTo>
+                  <a:pt x="2380498" y="1706460"/>
+                </a:lnTo>
+                <a:lnTo>
+                  <a:pt x="2363372" y="1706460"/>
+                </a:lnTo>
+                <a:lnTo>
+                  <a:pt x="2346246" y="1706460"/>
+                </a:lnTo>
+                <a:lnTo>
+                  <a:pt x="2329120" y="1706460"/>
+                </a:lnTo>
+                <a:lnTo>
+                  <a:pt x="2311994" y="1706460"/>
+                </a:lnTo>
+                <a:lnTo>
+                  <a:pt x="2294868" y="1706460"/>
+                </a:lnTo>
+                <a:lnTo>
+                  <a:pt x="2277742" y="1706460"/>
+                </a:lnTo>
+                <a:lnTo>
+                  <a:pt x="2260616" y="1706460"/>
+                </a:lnTo>
+                <a:lnTo>
+                  <a:pt x="2243491" y="1706460"/>
+                </a:lnTo>
+                <a:lnTo>
+                  <a:pt x="2226365" y="1706460"/>
+                </a:lnTo>
+                <a:lnTo>
+                  <a:pt x="2209239" y="1706460"/>
+                </a:lnTo>
+                <a:lnTo>
+                  <a:pt x="2192113" y="1706460"/>
+                </a:lnTo>
+                <a:lnTo>
+                  <a:pt x="2174987" y="1706460"/>
+                </a:lnTo>
+                <a:lnTo>
+                  <a:pt x="2157861" y="1706460"/>
+                </a:lnTo>
+                <a:lnTo>
+                  <a:pt x="2140735" y="1706460"/>
+                </a:lnTo>
+                <a:lnTo>
+                  <a:pt x="2123609" y="1706460"/>
+                </a:lnTo>
+                <a:lnTo>
+                  <a:pt x="2106484" y="1706460"/>
+                </a:lnTo>
+                <a:lnTo>
+                  <a:pt x="2089358" y="1706460"/>
+                </a:lnTo>
+                <a:lnTo>
+                  <a:pt x="2072232" y="1706460"/>
+                </a:lnTo>
+                <a:lnTo>
+                  <a:pt x="2055106" y="1706460"/>
+                </a:lnTo>
+                <a:lnTo>
+                  <a:pt x="2037980" y="1706460"/>
+                </a:lnTo>
+                <a:lnTo>
+                  <a:pt x="2020854" y="1706460"/>
+                </a:lnTo>
+                <a:lnTo>
+                  <a:pt x="2003728" y="1706460"/>
+                </a:lnTo>
+                <a:lnTo>
+                  <a:pt x="1986602" y="1706460"/>
+                </a:lnTo>
+                <a:lnTo>
+                  <a:pt x="1969476" y="1706460"/>
+                </a:lnTo>
+                <a:lnTo>
+                  <a:pt x="1952351" y="1706460"/>
+                </a:lnTo>
+                <a:lnTo>
+                  <a:pt x="1935225" y="1706460"/>
+                </a:lnTo>
+                <a:lnTo>
+                  <a:pt x="1918099" y="1706460"/>
+                </a:lnTo>
+                <a:lnTo>
+                  <a:pt x="1900973" y="1706460"/>
+                </a:lnTo>
+                <a:lnTo>
+                  <a:pt x="1883847" y="1706460"/>
+                </a:lnTo>
+                <a:lnTo>
+                  <a:pt x="1866721" y="1706460"/>
+                </a:lnTo>
+                <a:lnTo>
+                  <a:pt x="1849595" y="1706460"/>
+                </a:lnTo>
+                <a:lnTo>
+                  <a:pt x="1832469" y="1706460"/>
+                </a:lnTo>
+                <a:lnTo>
+                  <a:pt x="1815343" y="1706460"/>
+                </a:lnTo>
+                <a:lnTo>
+                  <a:pt x="1798218" y="1706460"/>
+                </a:lnTo>
+                <a:lnTo>
+                  <a:pt x="1781092" y="1706460"/>
+                </a:lnTo>
+                <a:lnTo>
+                  <a:pt x="1763966" y="1706460"/>
+                </a:lnTo>
+                <a:lnTo>
+                  <a:pt x="1746840" y="1706460"/>
+                </a:lnTo>
+                <a:lnTo>
+                  <a:pt x="1729714" y="1706460"/>
+                </a:lnTo>
+                <a:lnTo>
+                  <a:pt x="1712588" y="1706460"/>
+                </a:lnTo>
+                <a:lnTo>
+                  <a:pt x="1695462" y="1706460"/>
+                </a:lnTo>
+                <a:lnTo>
+                  <a:pt x="1678336" y="1706460"/>
+                </a:lnTo>
+                <a:lnTo>
+                  <a:pt x="1661210" y="1706460"/>
+                </a:lnTo>
+                <a:lnTo>
+                  <a:pt x="1644085" y="1706460"/>
+                </a:lnTo>
+                <a:lnTo>
+                  <a:pt x="1626959" y="1706460"/>
+                </a:lnTo>
+                <a:lnTo>
+                  <a:pt x="1609833" y="1706460"/>
+                </a:lnTo>
+                <a:lnTo>
+                  <a:pt x="1592707" y="1706460"/>
+                </a:lnTo>
+                <a:lnTo>
+                  <a:pt x="1575581" y="1706460"/>
+                </a:lnTo>
+                <a:lnTo>
+                  <a:pt x="1558455" y="1706460"/>
+                </a:lnTo>
+                <a:lnTo>
+                  <a:pt x="1541329" y="1706460"/>
+                </a:lnTo>
+                <a:lnTo>
+                  <a:pt x="1524203" y="1706460"/>
+                </a:lnTo>
+                <a:lnTo>
+                  <a:pt x="1507077" y="1706460"/>
+                </a:lnTo>
+                <a:lnTo>
+                  <a:pt x="1489952" y="1706460"/>
+                </a:lnTo>
+                <a:lnTo>
+                  <a:pt x="1472826" y="1706460"/>
+                </a:lnTo>
+                <a:lnTo>
+                  <a:pt x="1455700" y="1706460"/>
+                </a:lnTo>
+                <a:lnTo>
+                  <a:pt x="1438574" y="1706460"/>
+                </a:lnTo>
+                <a:lnTo>
+                  <a:pt x="1421448" y="1706460"/>
+                </a:lnTo>
+                <a:lnTo>
+                  <a:pt x="1404322" y="1706460"/>
+                </a:lnTo>
+                <a:lnTo>
+                  <a:pt x="1387196" y="1706460"/>
+                </a:lnTo>
+                <a:lnTo>
+                  <a:pt x="1370070" y="1706460"/>
+                </a:lnTo>
+                <a:lnTo>
+                  <a:pt x="1352945" y="1706460"/>
+                </a:lnTo>
+                <a:lnTo>
+                  <a:pt x="1335819" y="1706460"/>
+                </a:lnTo>
+                <a:lnTo>
+                  <a:pt x="1318693" y="1706460"/>
+                </a:lnTo>
+                <a:lnTo>
+                  <a:pt x="1301567" y="1706460"/>
+                </a:lnTo>
+                <a:lnTo>
+                  <a:pt x="1284441" y="1706460"/>
+                </a:lnTo>
+                <a:lnTo>
+                  <a:pt x="1267315" y="1706460"/>
+                </a:lnTo>
+                <a:lnTo>
+                  <a:pt x="1250189" y="1706460"/>
+                </a:lnTo>
+                <a:lnTo>
+                  <a:pt x="1233063" y="1706460"/>
+                </a:lnTo>
+                <a:lnTo>
+                  <a:pt x="1215937" y="1706460"/>
+                </a:lnTo>
+                <a:lnTo>
+                  <a:pt x="1198812" y="1706460"/>
+                </a:lnTo>
+                <a:lnTo>
+                  <a:pt x="1181686" y="1706460"/>
+                </a:lnTo>
+                <a:lnTo>
+                  <a:pt x="1164560" y="1706460"/>
+                </a:lnTo>
+                <a:lnTo>
+                  <a:pt x="1147434" y="1706460"/>
+                </a:lnTo>
+                <a:lnTo>
+                  <a:pt x="1130308" y="1706460"/>
+                </a:lnTo>
+                <a:lnTo>
+                  <a:pt x="1113182" y="1706460"/>
+                </a:lnTo>
+                <a:lnTo>
+                  <a:pt x="1096056" y="1706460"/>
+                </a:lnTo>
+                <a:lnTo>
+                  <a:pt x="1078930" y="1706460"/>
+                </a:lnTo>
+                <a:lnTo>
+                  <a:pt x="1061804" y="1706460"/>
+                </a:lnTo>
+                <a:lnTo>
+                  <a:pt x="1044679" y="1706460"/>
+                </a:lnTo>
+                <a:lnTo>
+                  <a:pt x="1027553" y="1706460"/>
+                </a:lnTo>
+                <a:lnTo>
+                  <a:pt x="1010427" y="1706460"/>
+                </a:lnTo>
+                <a:lnTo>
+                  <a:pt x="993301" y="1706460"/>
+                </a:lnTo>
+                <a:lnTo>
+                  <a:pt x="976175" y="1706460"/>
+                </a:lnTo>
+                <a:lnTo>
+                  <a:pt x="959049" y="1706460"/>
+                </a:lnTo>
+                <a:lnTo>
+                  <a:pt x="941923" y="1706460"/>
+                </a:lnTo>
+                <a:lnTo>
+                  <a:pt x="924797" y="1706460"/>
+                </a:lnTo>
+                <a:lnTo>
+                  <a:pt x="907671" y="1706460"/>
+                </a:lnTo>
+                <a:lnTo>
+                  <a:pt x="890546" y="1706460"/>
+                </a:lnTo>
+                <a:lnTo>
+                  <a:pt x="873420" y="1706460"/>
+                </a:lnTo>
+                <a:lnTo>
+                  <a:pt x="856294" y="1706460"/>
+                </a:lnTo>
+                <a:lnTo>
+                  <a:pt x="839168" y="1706460"/>
+                </a:lnTo>
+                <a:lnTo>
+                  <a:pt x="822042" y="1706460"/>
+                </a:lnTo>
+                <a:lnTo>
+                  <a:pt x="804916" y="1706460"/>
+                </a:lnTo>
+                <a:lnTo>
+                  <a:pt x="787790" y="1706460"/>
+                </a:lnTo>
+                <a:lnTo>
+                  <a:pt x="770664" y="1706460"/>
+                </a:lnTo>
+                <a:lnTo>
+                  <a:pt x="753538" y="1706460"/>
+                </a:lnTo>
+                <a:lnTo>
+                  <a:pt x="736413" y="1706460"/>
+                </a:lnTo>
+                <a:lnTo>
+                  <a:pt x="719287" y="1706460"/>
+                </a:lnTo>
+                <a:lnTo>
+                  <a:pt x="702161" y="1706460"/>
+                </a:lnTo>
+                <a:lnTo>
+                  <a:pt x="685035" y="1706460"/>
+                </a:lnTo>
+                <a:lnTo>
+                  <a:pt x="667909" y="1706460"/>
+                </a:lnTo>
+                <a:lnTo>
+                  <a:pt x="650783" y="1706460"/>
+                </a:lnTo>
+                <a:lnTo>
+                  <a:pt x="633657" y="1706460"/>
+                </a:lnTo>
+                <a:lnTo>
+                  <a:pt x="616531" y="1706460"/>
+                </a:lnTo>
+                <a:lnTo>
+                  <a:pt x="599406" y="1706460"/>
+                </a:lnTo>
+                <a:lnTo>
+                  <a:pt x="582280" y="1706460"/>
+                </a:lnTo>
+                <a:lnTo>
+                  <a:pt x="565154" y="1706460"/>
+                </a:lnTo>
+                <a:lnTo>
+                  <a:pt x="548028" y="1706460"/>
+                </a:lnTo>
+                <a:lnTo>
+                  <a:pt x="530902" y="1706460"/>
+                </a:lnTo>
+                <a:lnTo>
+                  <a:pt x="513776" y="1706460"/>
+                </a:lnTo>
+                <a:lnTo>
+                  <a:pt x="496650" y="1706460"/>
+                </a:lnTo>
+                <a:lnTo>
+                  <a:pt x="479524" y="1706460"/>
+                </a:lnTo>
+                <a:lnTo>
+                  <a:pt x="462398" y="1706460"/>
+                </a:lnTo>
+                <a:lnTo>
+                  <a:pt x="445273" y="1706460"/>
+                </a:lnTo>
+                <a:lnTo>
+                  <a:pt x="428147" y="1706460"/>
+                </a:lnTo>
+                <a:lnTo>
+                  <a:pt x="411021" y="1706460"/>
+                </a:lnTo>
+                <a:lnTo>
+                  <a:pt x="393895" y="1706460"/>
+                </a:lnTo>
+                <a:lnTo>
+                  <a:pt x="376769" y="1706460"/>
+                </a:lnTo>
+                <a:lnTo>
+                  <a:pt x="359643" y="1706460"/>
+                </a:lnTo>
+                <a:lnTo>
+                  <a:pt x="342517" y="1706460"/>
+                </a:lnTo>
+                <a:lnTo>
+                  <a:pt x="325391" y="1706460"/>
+                </a:lnTo>
+                <a:lnTo>
+                  <a:pt x="308265" y="1706460"/>
+                </a:lnTo>
+                <a:lnTo>
+                  <a:pt x="291140" y="1706460"/>
+                </a:lnTo>
+                <a:lnTo>
+                  <a:pt x="274014" y="1706460"/>
+                </a:lnTo>
+                <a:lnTo>
+                  <a:pt x="256888" y="1706460"/>
+                </a:lnTo>
+                <a:lnTo>
+                  <a:pt x="239762" y="1706460"/>
+                </a:lnTo>
+                <a:lnTo>
+                  <a:pt x="222636" y="1706460"/>
+                </a:lnTo>
+                <a:lnTo>
+                  <a:pt x="205510" y="1706460"/>
+                </a:lnTo>
+                <a:lnTo>
+                  <a:pt x="188384" y="1706460"/>
+                </a:lnTo>
+                <a:lnTo>
+                  <a:pt x="171258" y="1706460"/>
+                </a:lnTo>
+                <a:lnTo>
+                  <a:pt x="154132" y="1706460"/>
+                </a:lnTo>
+                <a:lnTo>
+                  <a:pt x="137007" y="1706460"/>
+                </a:lnTo>
+                <a:lnTo>
+                  <a:pt x="119881" y="1706460"/>
+                </a:lnTo>
+                <a:lnTo>
+                  <a:pt x="102755" y="1706460"/>
+                </a:lnTo>
+                <a:lnTo>
+                  <a:pt x="85629" y="1706460"/>
+                </a:lnTo>
+                <a:lnTo>
+                  <a:pt x="68503" y="1706460"/>
+                </a:lnTo>
+                <a:lnTo>
+                  <a:pt x="51377" y="1706460"/>
+                </a:lnTo>
+                <a:lnTo>
+                  <a:pt x="34251" y="1706460"/>
+                </a:lnTo>
+                <a:lnTo>
+                  <a:pt x="17125" y="1706460"/>
+                </a:lnTo>
+                <a:lnTo>
+                  <a:pt x="0" y="1706460"/>
+                </a:lnTo>
+                <a:close/>
+              </a:path>
+            </a:pathLst>
+          </a:custGeom>
+          <a:solidFill>
+            <a:srgbClr val="8EDBD4">
+              <a:alpha val="30000"/>
+            </a:srgbClr>
+          </a:solidFill>
+          <a:ln w="10160">
+            <a:solidFill>
+              <a:srgbClr val="8EDBD4">
+                <a:alpha val="30000"/>
+              </a:srgbClr>
+            </a:solidFill>
+          </a:ln>
+          <a:effectLst/>
+        </p:spPr>
+        <p:txBody>
+          <a:bodyPr rtlCol="0" anchor="ctr"/>
+          <a:lstStyle/>
+          <a:p>
+            <a:pPr algn="ctr"/>
+          </a:p>
+        </p:txBody>
+      </p:sp>
+      <p:sp>
+        <p:nvSpPr>
+          <p:cNvPr id="33" name="C2-E02 polygon 31" descr="sci-ppt:o031"/>
+          <p:cNvSpPr/>
+          <p:nvPr/>
+        </p:nvSpPr>
+        <p:spPr>
+          <a:xfrm>
+            <a:off x="868680" y="3322740"/>
+            <a:ext cx="5120640" cy="1706460"/>
+          </a:xfrm>
+          <a:custGeom>
+            <a:avLst/>
+            <a:gdLst/>
+            <a:ahLst/>
+            <a:cxnLst/>
+            <a:rect l="l" t="t" r="r" b="b"/>
+            <a:pathLst>
+              <a:path w="5120640" h="1706460">
+                <a:moveTo>
+                  <a:pt x="0" y="1706460"/>
+                </a:moveTo>
+                <a:lnTo>
+                  <a:pt x="34251" y="1616172"/>
+                </a:lnTo>
+                <a:lnTo>
+                  <a:pt x="68503" y="1526163"/>
+                </a:lnTo>
+                <a:lnTo>
+                  <a:pt x="102755" y="1436711"/>
+                </a:lnTo>
+                <a:lnTo>
+                  <a:pt x="137007" y="1348090"/>
+                </a:lnTo>
+                <a:lnTo>
+                  <a:pt x="171258" y="1260571"/>
+                </a:lnTo>
+                <a:lnTo>
+                  <a:pt x="205510" y="1174418"/>
+                </a:lnTo>
+                <a:lnTo>
+                  <a:pt x="239762" y="1089890"/>
+                </a:lnTo>
+                <a:lnTo>
+                  <a:pt x="274014" y="1007235"/>
+                </a:lnTo>
+                <a:lnTo>
+                  <a:pt x="308265" y="926695"/>
+                </a:lnTo>
+                <a:lnTo>
+                  <a:pt x="342517" y="848498"/>
+                </a:lnTo>
+                <a:lnTo>
+                  <a:pt x="376769" y="772862"/>
+                </a:lnTo>
+                <a:lnTo>
+                  <a:pt x="411021" y="699992"/>
+                </a:lnTo>
+                <a:lnTo>
+                  <a:pt x="445273" y="630079"/>
+                </a:lnTo>
+                <a:lnTo>
+                  <a:pt x="479524" y="563301"/>
+                </a:lnTo>
+                <a:lnTo>
+                  <a:pt x="513776" y="499818"/>
+                </a:lnTo>
+                <a:lnTo>
+                  <a:pt x="548028" y="439777"/>
+                </a:lnTo>
+                <a:lnTo>
+                  <a:pt x="582280" y="383308"/>
+                </a:lnTo>
+                <a:lnTo>
+                  <a:pt x="616531" y="330523"/>
+                </a:lnTo>
+                <a:lnTo>
+                  <a:pt x="650783" y="281518"/>
+                </a:lnTo>
+                <a:lnTo>
+                  <a:pt x="685035" y="236371"/>
+                </a:lnTo>
+                <a:lnTo>
+                  <a:pt x="719287" y="195145"/>
+                </a:lnTo>
+                <a:lnTo>
+                  <a:pt x="753538" y="157882"/>
+                </a:lnTo>
+                <a:lnTo>
+                  <a:pt x="787790" y="124611"/>
+                </a:lnTo>
+                <a:lnTo>
+                  <a:pt x="822042" y="95342"/>
+                </a:lnTo>
+                <a:lnTo>
+                  <a:pt x="856294" y="70067"/>
+                </a:lnTo>
+                <a:lnTo>
+                  <a:pt x="890546" y="48765"/>
+                </a:lnTo>
+                <a:lnTo>
+                  <a:pt x="924797" y="31397"/>
+                </a:lnTo>
+                <a:lnTo>
+                  <a:pt x="959049" y="17911"/>
+                </a:lnTo>
+                <a:lnTo>
+                  <a:pt x="993301" y="8238"/>
+                </a:lnTo>
+                <a:lnTo>
+                  <a:pt x="1027553" y="2299"/>
+                </a:lnTo>
+                <a:lnTo>
+                  <a:pt x="1061804" y="0"/>
+                </a:lnTo>
+                <a:lnTo>
+                  <a:pt x="1096056" y="1234"/>
+                </a:lnTo>
+                <a:lnTo>
+                  <a:pt x="1130308" y="5885"/>
+                </a:lnTo>
+                <a:lnTo>
+                  <a:pt x="1164560" y="13826"/>
+                </a:lnTo>
+                <a:lnTo>
+                  <a:pt x="1198812" y="24923"/>
+                </a:lnTo>
+                <a:lnTo>
+                  <a:pt x="1233063" y="39030"/>
+                </a:lnTo>
+                <a:lnTo>
+                  <a:pt x="1267315" y="55996"/>
+                </a:lnTo>
+                <a:lnTo>
+                  <a:pt x="1301567" y="75666"/>
+                </a:lnTo>
+                <a:lnTo>
+                  <a:pt x="1335819" y="97875"/>
+                </a:lnTo>
+                <a:lnTo>
+                  <a:pt x="1370070" y="122460"/>
+                </a:lnTo>
+                <a:lnTo>
+                  <a:pt x="1404322" y="149249"/>
+                </a:lnTo>
+                <a:lnTo>
+                  <a:pt x="1438574" y="178073"/>
+                </a:lnTo>
+                <a:lnTo>
+                  <a:pt x="1472826" y="208758"/>
+                </a:lnTo>
+                <a:lnTo>
+                  <a:pt x="1507077" y="241132"/>
+                </a:lnTo>
+                <a:lnTo>
+                  <a:pt x="1541329" y="275023"/>
+                </a:lnTo>
+                <a:lnTo>
+                  <a:pt x="1575581" y="310261"/>
+                </a:lnTo>
+                <a:lnTo>
+                  <a:pt x="1609833" y="346678"/>
+                </a:lnTo>
+                <a:lnTo>
+                  <a:pt x="1644085" y="384108"/>
+                </a:lnTo>
+                <a:lnTo>
+                  <a:pt x="1678336" y="422390"/>
+                </a:lnTo>
+                <a:lnTo>
+                  <a:pt x="1712588" y="461368"/>
+                </a:lnTo>
+                <a:lnTo>
+                  <a:pt x="1746840" y="500888"/>
+                </a:lnTo>
+                <a:lnTo>
+                  <a:pt x="1781092" y="540806"/>
+                </a:lnTo>
+                <a:lnTo>
+                  <a:pt x="1815343" y="580979"/>
+                </a:lnTo>
+                <a:lnTo>
+                  <a:pt x="1849595" y="621274"/>
+                </a:lnTo>
+                <a:lnTo>
+                  <a:pt x="1883847" y="661562"/>
+                </a:lnTo>
+                <a:lnTo>
+                  <a:pt x="1918099" y="701724"/>
+                </a:lnTo>
+                <a:lnTo>
+                  <a:pt x="1952351" y="741645"/>
+                </a:lnTo>
+                <a:lnTo>
+                  <a:pt x="1986602" y="781220"/>
+                </a:lnTo>
+                <a:lnTo>
+                  <a:pt x="2020854" y="820349"/>
+                </a:lnTo>
+                <a:lnTo>
+                  <a:pt x="2055106" y="858941"/>
+                </a:lnTo>
+                <a:lnTo>
+                  <a:pt x="2089358" y="896913"/>
+                </a:lnTo>
+                <a:lnTo>
+                  <a:pt x="2123609" y="934187"/>
+                </a:lnTo>
+                <a:lnTo>
+                  <a:pt x="2157861" y="970696"/>
+                </a:lnTo>
+                <a:lnTo>
+                  <a:pt x="2192113" y="1006377"/>
+                </a:lnTo>
+                <a:lnTo>
+                  <a:pt x="2226365" y="1041177"/>
+                </a:lnTo>
+                <a:lnTo>
+                  <a:pt x="2260616" y="1075048"/>
+                </a:lnTo>
+                <a:lnTo>
+                  <a:pt x="2294868" y="1107950"/>
+                </a:lnTo>
+                <a:lnTo>
+                  <a:pt x="2329120" y="1139847"/>
+                </a:lnTo>
+                <a:lnTo>
+                  <a:pt x="2363372" y="1170714"/>
+                </a:lnTo>
+                <a:lnTo>
+                  <a:pt x="2397624" y="1200527"/>
+                </a:lnTo>
+                <a:lnTo>
+                  <a:pt x="2431875" y="1229271"/>
+                </a:lnTo>
+                <a:lnTo>
+                  <a:pt x="2466127" y="1256934"/>
+                </a:lnTo>
+                <a:lnTo>
+                  <a:pt x="2500379" y="1283512"/>
+                </a:lnTo>
+                <a:lnTo>
+                  <a:pt x="2534631" y="1309003"/>
+                </a:lnTo>
+                <a:lnTo>
+                  <a:pt x="2568882" y="1333411"/>
+                </a:lnTo>
+                <a:lnTo>
+                  <a:pt x="2603134" y="1356742"/>
+                </a:lnTo>
+                <a:lnTo>
+                  <a:pt x="2637386" y="1379009"/>
+                </a:lnTo>
+                <a:lnTo>
+                  <a:pt x="2671638" y="1400226"/>
+                </a:lnTo>
+                <a:lnTo>
+                  <a:pt x="2705890" y="1420410"/>
+                </a:lnTo>
+                <a:lnTo>
+                  <a:pt x="2740141" y="1439582"/>
+                </a:lnTo>
+                <a:lnTo>
+                  <a:pt x="2774393" y="1457764"/>
+                </a:lnTo>
+                <a:lnTo>
+                  <a:pt x="2808645" y="1474982"/>
+                </a:lnTo>
+                <a:lnTo>
+                  <a:pt x="2842897" y="1491262"/>
+                </a:lnTo>
+                <a:lnTo>
+                  <a:pt x="2877148" y="1506631"/>
+                </a:lnTo>
+                <a:lnTo>
+                  <a:pt x="2911400" y="1521121"/>
+                </a:lnTo>
+                <a:lnTo>
+                  <a:pt x="2945652" y="1534761"/>
+                </a:lnTo>
+                <a:lnTo>
+                  <a:pt x="2979904" y="1547582"/>
+                </a:lnTo>
+                <a:lnTo>
+                  <a:pt x="3014155" y="1559617"/>
+                </a:lnTo>
+                <a:lnTo>
+                  <a:pt x="3048407" y="1570897"/>
+                </a:lnTo>
+                <a:lnTo>
+                  <a:pt x="3082659" y="1581456"/>
+                </a:lnTo>
+                <a:lnTo>
+                  <a:pt x="3116911" y="1591325"/>
+                </a:lnTo>
+                <a:lnTo>
+                  <a:pt x="3151163" y="1600538"/>
+                </a:lnTo>
+                <a:lnTo>
+                  <a:pt x="3185414" y="1609124"/>
+                </a:lnTo>
+                <a:lnTo>
+                  <a:pt x="3219666" y="1617118"/>
+                </a:lnTo>
+                <a:lnTo>
+                  <a:pt x="3253918" y="1624548"/>
+                </a:lnTo>
+                <a:lnTo>
+                  <a:pt x="3288170" y="1631447"/>
+                </a:lnTo>
+                <a:lnTo>
+                  <a:pt x="3322421" y="1637842"/>
+                </a:lnTo>
+                <a:lnTo>
+                  <a:pt x="3356673" y="1643764"/>
+                </a:lnTo>
+                <a:lnTo>
+                  <a:pt x="3390925" y="1649240"/>
+                </a:lnTo>
+                <a:lnTo>
+                  <a:pt x="3425177" y="1654296"/>
+                </a:lnTo>
+                <a:lnTo>
+                  <a:pt x="3459429" y="1658959"/>
+                </a:lnTo>
+                <a:lnTo>
+                  <a:pt x="3493680" y="1663255"/>
+                </a:lnTo>
+                <a:lnTo>
+                  <a:pt x="3527932" y="1667206"/>
+                </a:lnTo>
+                <a:lnTo>
+                  <a:pt x="3562184" y="1670836"/>
+                </a:lnTo>
+                <a:lnTo>
+                  <a:pt x="3596436" y="1674166"/>
+                </a:lnTo>
+                <a:lnTo>
+                  <a:pt x="3630687" y="1677218"/>
+                </a:lnTo>
+                <a:lnTo>
+                  <a:pt x="3664939" y="1680011"/>
+                </a:lnTo>
+                <a:lnTo>
+                  <a:pt x="3699191" y="1682565"/>
+                </a:lnTo>
+                <a:lnTo>
+                  <a:pt x="3733443" y="1684895"/>
+                </a:lnTo>
+                <a:lnTo>
+                  <a:pt x="3767694" y="1687020"/>
+                </a:lnTo>
+                <a:lnTo>
+                  <a:pt x="3801946" y="1688956"/>
+                </a:lnTo>
+                <a:lnTo>
+                  <a:pt x="3836198" y="1690716"/>
+                </a:lnTo>
+                <a:lnTo>
+                  <a:pt x="3870450" y="1692314"/>
+                </a:lnTo>
+                <a:lnTo>
+                  <a:pt x="3904702" y="1693765"/>
+                </a:lnTo>
+                <a:lnTo>
+                  <a:pt x="3938953" y="1695079"/>
+                </a:lnTo>
+                <a:lnTo>
+                  <a:pt x="3973205" y="1696269"/>
+                </a:lnTo>
+                <a:lnTo>
+                  <a:pt x="4007457" y="1697344"/>
+                </a:lnTo>
+                <a:lnTo>
+                  <a:pt x="4041709" y="1698315"/>
+                </a:lnTo>
+                <a:lnTo>
+                  <a:pt x="4075960" y="1699190"/>
+                </a:lnTo>
+                <a:lnTo>
+                  <a:pt x="4110212" y="1699979"/>
+                </a:lnTo>
+                <a:lnTo>
+                  <a:pt x="4144464" y="1700688"/>
+                </a:lnTo>
+                <a:lnTo>
+                  <a:pt x="4178716" y="1701326"/>
+                </a:lnTo>
+                <a:lnTo>
+                  <a:pt x="4212968" y="1701898"/>
+                </a:lnTo>
+                <a:lnTo>
+                  <a:pt x="4247219" y="1702410"/>
+                </a:lnTo>
+                <a:lnTo>
+                  <a:pt x="4281471" y="1702869"/>
+                </a:lnTo>
+                <a:lnTo>
+                  <a:pt x="4315723" y="1703280"/>
+                </a:lnTo>
+                <a:lnTo>
+                  <a:pt x="4349975" y="1703646"/>
+                </a:lnTo>
+                <a:lnTo>
+                  <a:pt x="4384226" y="1703973"/>
+                </a:lnTo>
+                <a:lnTo>
+                  <a:pt x="4418478" y="1704265"/>
+                </a:lnTo>
+                <a:lnTo>
+                  <a:pt x="4452730" y="1704524"/>
+                </a:lnTo>
+                <a:lnTo>
+                  <a:pt x="4486982" y="1704755"/>
+                </a:lnTo>
+                <a:lnTo>
+                  <a:pt x="4521233" y="1704960"/>
+                </a:lnTo>
+                <a:lnTo>
+                  <a:pt x="4555485" y="1705141"/>
+                </a:lnTo>
+                <a:lnTo>
+                  <a:pt x="4589737" y="1705302"/>
+                </a:lnTo>
+                <a:lnTo>
+                  <a:pt x="4623989" y="1705444"/>
+                </a:lnTo>
+                <a:lnTo>
+                  <a:pt x="4658241" y="1705570"/>
+                </a:lnTo>
+                <a:lnTo>
+                  <a:pt x="4692492" y="1705681"/>
+                </a:lnTo>
+                <a:lnTo>
+                  <a:pt x="4726744" y="1705779"/>
+                </a:lnTo>
+                <a:lnTo>
+                  <a:pt x="4760996" y="1705865"/>
+                </a:lnTo>
+                <a:lnTo>
+                  <a:pt x="4795248" y="1705941"/>
+                </a:lnTo>
+                <a:lnTo>
+                  <a:pt x="4829499" y="1706008"/>
+                </a:lnTo>
+                <a:lnTo>
+                  <a:pt x="4863751" y="1706066"/>
+                </a:lnTo>
+                <a:lnTo>
+                  <a:pt x="4898003" y="1706118"/>
+                </a:lnTo>
+                <a:lnTo>
+                  <a:pt x="4932255" y="1706163"/>
+                </a:lnTo>
+                <a:lnTo>
+                  <a:pt x="4966507" y="1706202"/>
+                </a:lnTo>
+                <a:lnTo>
+                  <a:pt x="5000758" y="1706236"/>
+                </a:lnTo>
+                <a:lnTo>
+                  <a:pt x="5035010" y="1706266"/>
+                </a:lnTo>
+                <a:lnTo>
+                  <a:pt x="5069262" y="1706292"/>
+                </a:lnTo>
+                <a:lnTo>
+                  <a:pt x="5103514" y="1706315"/>
+                </a:lnTo>
+                <a:lnTo>
+                  <a:pt x="5120640" y="1706325"/>
+                </a:lnTo>
+              </a:path>
+            </a:pathLst>
+          </a:custGeom>
+          <a:noFill/>
+          <a:ln w="38100">
             <a:solidFill>
               <a:srgbClr val="8EDBD4"/>
             </a:solidFill>
           </a:ln>
           <a:effectLst/>
         </p:spPr>
+        <p:txBody>
+          <a:bodyPr rtlCol="0" anchor="ctr"/>
+          <a:lstStyle/>
+          <a:p>
+            <a:pPr algn="ctr"/>
+          </a:p>
+        </p:txBody>
+      </p:sp>
+      <p:cxnSp>
+        <p:nvCxnSpPr>
+          <p:cNvPr id="34" name="C2-E02 line 32" descr="sci-ppt:o032"/>
+          <p:cNvCxnSpPr/>
+          <p:nvPr/>
+        </p:nvCxnSpPr>
+        <p:spPr>
+          <a:xfrm>
+            <a:off x="1935480" y="1371600"/>
+            <a:ext cx="0" cy="3657600"/>
+          </a:xfrm>
+          <a:prstGeom prst="line">
+            <a:avLst/>
+          </a:prstGeom>
+          <a:ln w="16510">
+            <a:solidFill>
+              <a:srgbClr val="F2B880"/>
+            </a:solidFill>
+            <a:prstDash val="dash"/>
+          </a:ln>
+          <a:effectLst/>
+        </p:spPr>
+      </p:cxnSp>
+      <p:sp>
+        <p:nvSpPr>
+          <p:cNvPr id="35" name="C2-E02 text 33" descr="sci-ppt:o033"/>
+          <p:cNvSpPr txBox="1"/>
+          <p:nvPr/>
+        </p:nvSpPr>
+        <p:spPr>
+          <a:xfrm>
+            <a:off x="2045208" y="1607233"/>
+            <a:ext cx="2194560" cy="239395"/>
+          </a:xfrm>
+          <a:prstGeom prst="rect">
+            <a:avLst/>
+          </a:prstGeom>
+          <a:noFill/>
+          <a:effectLst/>
+        </p:spPr>
+        <p:txBody>
+          <a:bodyPr wrap="none" lIns="18288" rIns="18288" tIns="18288" bIns="18288" anchor="t">
+            <a:spAutoFit/>
+          </a:bodyPr>
+          <a:lstStyle/>
+          <a:p>
+            <a:pPr algn="l">
+              <a:spcAft>
+                <a:spcPts val="0"/>
+              </a:spcAft>
+            </a:pPr>
+            <a:r>
+              <a:rPr sz="1250" b="0" i="0">
+                <a:solidFill>
+                  <a:srgbClr val="F2B880"/>
+                </a:solidFill>
+                <a:latin typeface="Arial"/>
+              </a:rPr>
+              <a:t>peak ring at r = w/2</a:t>
+            </a:r>
+          </a:p>
+        </p:txBody>
+      </p:sp>
+      <p:sp>
+        <p:nvSpPr>
+          <p:cNvPr id="36" name="C2-E02 text 34" descr="sci-ppt:o034"/>
+          <p:cNvSpPr txBox="1"/>
+          <p:nvPr/>
+        </p:nvSpPr>
+        <p:spPr>
+          <a:xfrm>
+            <a:off x="3288792" y="3249636"/>
+            <a:ext cx="2560320" cy="239395"/>
+          </a:xfrm>
+          <a:prstGeom prst="rect">
+            <a:avLst/>
+          </a:prstGeom>
+          <a:noFill/>
+          <a:effectLst/>
+        </p:spPr>
+        <p:txBody>
+          <a:bodyPr wrap="none" lIns="18288" rIns="18288" tIns="18288" bIns="18288" anchor="t">
+            <a:spAutoFit/>
+          </a:bodyPr>
+          <a:lstStyle/>
+          <a:p>
+            <a:pPr algn="l">
+              <a:spcAft>
+                <a:spcPts val="0"/>
+              </a:spcAft>
+            </a:pPr>
+            <a:r>
+              <a:rPr sz="1250" b="0" i="0">
+                <a:solidFill>
+                  <a:srgbClr val="8EDBD4"/>
+                </a:solidFill>
+                <a:latin typeface="Arial"/>
+              </a:rPr>
+              <a:t>area under the curve = E_L</a:t>
+            </a:r>
+          </a:p>
+        </p:txBody>
+      </p:sp>
+      <p:cxnSp>
+        <p:nvCxnSpPr>
+          <p:cNvPr id="37" name="C2-E02 line 35" descr="sci-ppt:o035"/>
+          <p:cNvCxnSpPr/>
+          <p:nvPr/>
+        </p:nvCxnSpPr>
+        <p:spPr>
+          <a:xfrm>
+            <a:off x="6675120" y="5029200"/>
+            <a:ext cx="5120639" cy="0"/>
+          </a:xfrm>
+          <a:prstGeom prst="line">
+            <a:avLst/>
+          </a:prstGeom>
+          <a:ln w="19050">
+            <a:solidFill>
+              <a:srgbClr val="B4C7D2"/>
+            </a:solidFill>
+          </a:ln>
+          <a:effectLst/>
+        </p:spPr>
       </p:cxnSp>
       <p:cxnSp>
         <p:nvCxnSpPr>
-          <p:cNvPr id="13" name="line12" descr="sci-ppt:C2-E02-012"/>
+          <p:cNvPr id="38" name="C2-E02 line 36" descr="sci-ppt:o036"/>
           <p:cNvCxnSpPr/>
           <p:nvPr/>
         </p:nvCxnSpPr>
         <p:spPr>
           <a:xfrm>
-            <a:off x="6748272" y="1536161"/>
-            <a:ext cx="103632" cy="36122"/>
+            <a:off x="6675120" y="1371600"/>
+            <a:ext cx="0" cy="3657600"/>
           </a:xfrm>
           <a:prstGeom prst="line">
             <a:avLst/>
           </a:prstGeom>
-          <a:ln w="25400">
+          <a:ln w="19050">
+            <a:solidFill>
+              <a:srgbClr val="B4C7D2"/>
+            </a:solidFill>
+          </a:ln>
+          <a:effectLst/>
+        </p:spPr>
+      </p:cxnSp>
+      <p:cxnSp>
+        <p:nvCxnSpPr>
+          <p:cNvPr id="39" name="C2-E02 line 37" descr="sci-ppt:o037"/>
+          <p:cNvCxnSpPr/>
+          <p:nvPr/>
+        </p:nvCxnSpPr>
+        <p:spPr>
+          <a:xfrm>
+            <a:off x="6675120" y="5029200"/>
+            <a:ext cx="0" cy="64008"/>
+          </a:xfrm>
+          <a:prstGeom prst="line">
+            <a:avLst/>
+          </a:prstGeom>
+          <a:ln w="12700">
+            <a:solidFill>
+              <a:srgbClr val="B4C7D2"/>
+            </a:solidFill>
+          </a:ln>
+          <a:effectLst/>
+        </p:spPr>
+      </p:cxnSp>
+      <p:cxnSp>
+        <p:nvCxnSpPr>
+          <p:cNvPr id="40" name="C2-E02 line 38" descr="sci-ppt:o038"/>
+          <p:cNvCxnSpPr/>
+          <p:nvPr/>
+        </p:nvCxnSpPr>
+        <p:spPr>
+          <a:xfrm>
+            <a:off x="6675120" y="1371600"/>
+            <a:ext cx="0" cy="3657600"/>
+          </a:xfrm>
+          <a:prstGeom prst="line">
+            <a:avLst/>
+          </a:prstGeom>
+          <a:ln w="7620">
+            <a:solidFill>
+              <a:srgbClr val="2E4756"/>
+            </a:solidFill>
+          </a:ln>
+          <a:effectLst/>
+        </p:spPr>
+      </p:cxnSp>
+      <p:sp>
+        <p:nvSpPr>
+          <p:cNvPr id="41" name="C2-E02 text 39" descr="sci-ppt:o039"/>
+          <p:cNvSpPr txBox="1"/>
+          <p:nvPr/>
+        </p:nvSpPr>
+        <p:spPr>
+          <a:xfrm>
+            <a:off x="6217920" y="5111496"/>
+            <a:ext cx="914400" cy="208407"/>
+          </a:xfrm>
+          <a:prstGeom prst="rect">
+            <a:avLst/>
+          </a:prstGeom>
+          <a:noFill/>
+          <a:effectLst/>
+        </p:spPr>
+        <p:txBody>
+          <a:bodyPr wrap="none" lIns="18288" rIns="18288" tIns="18288" bIns="18288" anchor="t">
+            <a:spAutoFit/>
+          </a:bodyPr>
+          <a:lstStyle/>
+          <a:p>
+            <a:pPr algn="ctr">
+              <a:spcAft>
+                <a:spcPts val="0"/>
+              </a:spcAft>
+            </a:pPr>
+            <a:r>
+              <a:rPr sz="1050" b="0" i="0">
+                <a:solidFill>
+                  <a:srgbClr val="B4C7D2"/>
+                </a:solidFill>
+                <a:latin typeface="Arial"/>
+              </a:rPr>
+              <a:t>0.0</a:t>
+            </a:r>
+          </a:p>
+        </p:txBody>
+      </p:sp>
+      <p:cxnSp>
+        <p:nvCxnSpPr>
+          <p:cNvPr id="42" name="C2-E02 line 40" descr="sci-ppt:o040"/>
+          <p:cNvCxnSpPr/>
+          <p:nvPr/>
+        </p:nvCxnSpPr>
+        <p:spPr>
+          <a:xfrm>
+            <a:off x="7741920" y="5029200"/>
+            <a:ext cx="0" cy="64008"/>
+          </a:xfrm>
+          <a:prstGeom prst="line">
+            <a:avLst/>
+          </a:prstGeom>
+          <a:ln w="12700">
+            <a:solidFill>
+              <a:srgbClr val="B4C7D2"/>
+            </a:solidFill>
+          </a:ln>
+          <a:effectLst/>
+        </p:spPr>
+      </p:cxnSp>
+      <p:cxnSp>
+        <p:nvCxnSpPr>
+          <p:cNvPr id="43" name="C2-E02 line 41" descr="sci-ppt:o041"/>
+          <p:cNvCxnSpPr/>
+          <p:nvPr/>
+        </p:nvCxnSpPr>
+        <p:spPr>
+          <a:xfrm>
+            <a:off x="7741920" y="1371600"/>
+            <a:ext cx="0" cy="3657600"/>
+          </a:xfrm>
+          <a:prstGeom prst="line">
+            <a:avLst/>
+          </a:prstGeom>
+          <a:ln w="7620">
+            <a:solidFill>
+              <a:srgbClr val="2E4756"/>
+            </a:solidFill>
+          </a:ln>
+          <a:effectLst/>
+        </p:spPr>
+      </p:cxnSp>
+      <p:sp>
+        <p:nvSpPr>
+          <p:cNvPr id="44" name="C2-E02 text 42" descr="sci-ppt:o042"/>
+          <p:cNvSpPr txBox="1"/>
+          <p:nvPr/>
+        </p:nvSpPr>
+        <p:spPr>
+          <a:xfrm>
+            <a:off x="7284720" y="5111496"/>
+            <a:ext cx="914400" cy="208407"/>
+          </a:xfrm>
+          <a:prstGeom prst="rect">
+            <a:avLst/>
+          </a:prstGeom>
+          <a:noFill/>
+          <a:effectLst/>
+        </p:spPr>
+        <p:txBody>
+          <a:bodyPr wrap="none" lIns="18288" rIns="18288" tIns="18288" bIns="18288" anchor="t">
+            <a:spAutoFit/>
+          </a:bodyPr>
+          <a:lstStyle/>
+          <a:p>
+            <a:pPr algn="ctr">
+              <a:spcAft>
+                <a:spcPts val="0"/>
+              </a:spcAft>
+            </a:pPr>
+            <a:r>
+              <a:rPr sz="1050" b="0" i="0">
+                <a:solidFill>
+                  <a:srgbClr val="B4C7D2"/>
+                </a:solidFill>
+                <a:latin typeface="Arial"/>
+              </a:rPr>
+              <a:t>0.5</a:t>
+            </a:r>
+          </a:p>
+        </p:txBody>
+      </p:sp>
+      <p:cxnSp>
+        <p:nvCxnSpPr>
+          <p:cNvPr id="45" name="C2-E02 line 43" descr="sci-ppt:o043"/>
+          <p:cNvCxnSpPr/>
+          <p:nvPr/>
+        </p:nvCxnSpPr>
+        <p:spPr>
+          <a:xfrm>
+            <a:off x="8808720" y="5029200"/>
+            <a:ext cx="0" cy="64008"/>
+          </a:xfrm>
+          <a:prstGeom prst="line">
+            <a:avLst/>
+          </a:prstGeom>
+          <a:ln w="12700">
+            <a:solidFill>
+              <a:srgbClr val="B4C7D2"/>
+            </a:solidFill>
+          </a:ln>
+          <a:effectLst/>
+        </p:spPr>
+      </p:cxnSp>
+      <p:cxnSp>
+        <p:nvCxnSpPr>
+          <p:cNvPr id="46" name="C2-E02 line 44" descr="sci-ppt:o044"/>
+          <p:cNvCxnSpPr/>
+          <p:nvPr/>
+        </p:nvCxnSpPr>
+        <p:spPr>
+          <a:xfrm>
+            <a:off x="8808720" y="1371600"/>
+            <a:ext cx="0" cy="3657600"/>
+          </a:xfrm>
+          <a:prstGeom prst="line">
+            <a:avLst/>
+          </a:prstGeom>
+          <a:ln w="7620">
+            <a:solidFill>
+              <a:srgbClr val="2E4756"/>
+            </a:solidFill>
+          </a:ln>
+          <a:effectLst/>
+        </p:spPr>
+      </p:cxnSp>
+      <p:sp>
+        <p:nvSpPr>
+          <p:cNvPr id="47" name="C2-E02 text 45" descr="sci-ppt:o045"/>
+          <p:cNvSpPr txBox="1"/>
+          <p:nvPr/>
+        </p:nvSpPr>
+        <p:spPr>
+          <a:xfrm>
+            <a:off x="8351520" y="5111496"/>
+            <a:ext cx="914400" cy="208407"/>
+          </a:xfrm>
+          <a:prstGeom prst="rect">
+            <a:avLst/>
+          </a:prstGeom>
+          <a:noFill/>
+          <a:effectLst/>
+        </p:spPr>
+        <p:txBody>
+          <a:bodyPr wrap="none" lIns="18288" rIns="18288" tIns="18288" bIns="18288" anchor="t">
+            <a:spAutoFit/>
+          </a:bodyPr>
+          <a:lstStyle/>
+          <a:p>
+            <a:pPr algn="ctr">
+              <a:spcAft>
+                <a:spcPts val="0"/>
+              </a:spcAft>
+            </a:pPr>
+            <a:r>
+              <a:rPr sz="1050" b="0" i="0">
+                <a:solidFill>
+                  <a:srgbClr val="B4C7D2"/>
+                </a:solidFill>
+                <a:latin typeface="Arial"/>
+              </a:rPr>
+              <a:t>1.0</a:t>
+            </a:r>
+          </a:p>
+        </p:txBody>
+      </p:sp>
+      <p:cxnSp>
+        <p:nvCxnSpPr>
+          <p:cNvPr id="48" name="C2-E02 line 46" descr="sci-ppt:o046"/>
+          <p:cNvCxnSpPr/>
+          <p:nvPr/>
+        </p:nvCxnSpPr>
+        <p:spPr>
+          <a:xfrm>
+            <a:off x="9875520" y="5029200"/>
+            <a:ext cx="0" cy="64008"/>
+          </a:xfrm>
+          <a:prstGeom prst="line">
+            <a:avLst/>
+          </a:prstGeom>
+          <a:ln w="12700">
+            <a:solidFill>
+              <a:srgbClr val="B4C7D2"/>
+            </a:solidFill>
+          </a:ln>
+          <a:effectLst/>
+        </p:spPr>
+      </p:cxnSp>
+      <p:cxnSp>
+        <p:nvCxnSpPr>
+          <p:cNvPr id="49" name="C2-E02 line 47" descr="sci-ppt:o047"/>
+          <p:cNvCxnSpPr/>
+          <p:nvPr/>
+        </p:nvCxnSpPr>
+        <p:spPr>
+          <a:xfrm>
+            <a:off x="9875520" y="1371600"/>
+            <a:ext cx="0" cy="3657600"/>
+          </a:xfrm>
+          <a:prstGeom prst="line">
+            <a:avLst/>
+          </a:prstGeom>
+          <a:ln w="7620">
+            <a:solidFill>
+              <a:srgbClr val="2E4756"/>
+            </a:solidFill>
+          </a:ln>
+          <a:effectLst/>
+        </p:spPr>
+      </p:cxnSp>
+      <p:sp>
+        <p:nvSpPr>
+          <p:cNvPr id="50" name="C2-E02 text 48" descr="sci-ppt:o048"/>
+          <p:cNvSpPr txBox="1"/>
+          <p:nvPr/>
+        </p:nvSpPr>
+        <p:spPr>
+          <a:xfrm>
+            <a:off x="9418320" y="5111496"/>
+            <a:ext cx="914400" cy="208407"/>
+          </a:xfrm>
+          <a:prstGeom prst="rect">
+            <a:avLst/>
+          </a:prstGeom>
+          <a:noFill/>
+          <a:effectLst/>
+        </p:spPr>
+        <p:txBody>
+          <a:bodyPr wrap="none" lIns="18288" rIns="18288" tIns="18288" bIns="18288" anchor="t">
+            <a:spAutoFit/>
+          </a:bodyPr>
+          <a:lstStyle/>
+          <a:p>
+            <a:pPr algn="ctr">
+              <a:spcAft>
+                <a:spcPts val="0"/>
+              </a:spcAft>
+            </a:pPr>
+            <a:r>
+              <a:rPr sz="1050" b="0" i="0">
+                <a:solidFill>
+                  <a:srgbClr val="B4C7D2"/>
+                </a:solidFill>
+                <a:latin typeface="Arial"/>
+              </a:rPr>
+              <a:t>1.5</a:t>
+            </a:r>
+          </a:p>
+        </p:txBody>
+      </p:sp>
+      <p:cxnSp>
+        <p:nvCxnSpPr>
+          <p:cNvPr id="51" name="C2-E02 line 49" descr="sci-ppt:o049"/>
+          <p:cNvCxnSpPr/>
+          <p:nvPr/>
+        </p:nvCxnSpPr>
+        <p:spPr>
+          <a:xfrm>
+            <a:off x="10942320" y="5029200"/>
+            <a:ext cx="0" cy="64008"/>
+          </a:xfrm>
+          <a:prstGeom prst="line">
+            <a:avLst/>
+          </a:prstGeom>
+          <a:ln w="12700">
+            <a:solidFill>
+              <a:srgbClr val="B4C7D2"/>
+            </a:solidFill>
+          </a:ln>
+          <a:effectLst/>
+        </p:spPr>
+      </p:cxnSp>
+      <p:cxnSp>
+        <p:nvCxnSpPr>
+          <p:cNvPr id="52" name="C2-E02 line 50" descr="sci-ppt:o050"/>
+          <p:cNvCxnSpPr/>
+          <p:nvPr/>
+        </p:nvCxnSpPr>
+        <p:spPr>
+          <a:xfrm>
+            <a:off x="10942320" y="1371600"/>
+            <a:ext cx="0" cy="3657600"/>
+          </a:xfrm>
+          <a:prstGeom prst="line">
+            <a:avLst/>
+          </a:prstGeom>
+          <a:ln w="7620">
+            <a:solidFill>
+              <a:srgbClr val="2E4756"/>
+            </a:solidFill>
+          </a:ln>
+          <a:effectLst/>
+        </p:spPr>
+      </p:cxnSp>
+      <p:sp>
+        <p:nvSpPr>
+          <p:cNvPr id="53" name="C2-E02 text 51" descr="sci-ppt:o051"/>
+          <p:cNvSpPr txBox="1"/>
+          <p:nvPr/>
+        </p:nvSpPr>
+        <p:spPr>
+          <a:xfrm>
+            <a:off x="10485120" y="5111496"/>
+            <a:ext cx="914400" cy="208407"/>
+          </a:xfrm>
+          <a:prstGeom prst="rect">
+            <a:avLst/>
+          </a:prstGeom>
+          <a:noFill/>
+          <a:effectLst/>
+        </p:spPr>
+        <p:txBody>
+          <a:bodyPr wrap="none" lIns="18288" rIns="18288" tIns="18288" bIns="18288" anchor="t">
+            <a:spAutoFit/>
+          </a:bodyPr>
+          <a:lstStyle/>
+          <a:p>
+            <a:pPr algn="ctr">
+              <a:spcAft>
+                <a:spcPts val="0"/>
+              </a:spcAft>
+            </a:pPr>
+            <a:r>
+              <a:rPr sz="1050" b="0" i="0">
+                <a:solidFill>
+                  <a:srgbClr val="B4C7D2"/>
+                </a:solidFill>
+                <a:latin typeface="Arial"/>
+              </a:rPr>
+              <a:t>2.0</a:t>
+            </a:r>
+          </a:p>
+        </p:txBody>
+      </p:sp>
+      <p:cxnSp>
+        <p:nvCxnSpPr>
+          <p:cNvPr id="54" name="C2-E02 line 52" descr="sci-ppt:o052"/>
+          <p:cNvCxnSpPr/>
+          <p:nvPr/>
+        </p:nvCxnSpPr>
+        <p:spPr>
+          <a:xfrm>
+            <a:off x="6611112" y="5029200"/>
+            <a:ext cx="64008" cy="0"/>
+          </a:xfrm>
+          <a:prstGeom prst="line">
+            <a:avLst/>
+          </a:prstGeom>
+          <a:ln w="12700">
+            <a:solidFill>
+              <a:srgbClr val="B4C7D2"/>
+            </a:solidFill>
+          </a:ln>
+          <a:effectLst/>
+        </p:spPr>
+      </p:cxnSp>
+      <p:cxnSp>
+        <p:nvCxnSpPr>
+          <p:cNvPr id="55" name="C2-E02 line 53" descr="sci-ppt:o053"/>
+          <p:cNvCxnSpPr/>
+          <p:nvPr/>
+        </p:nvCxnSpPr>
+        <p:spPr>
+          <a:xfrm>
+            <a:off x="6611112" y="4158342"/>
+            <a:ext cx="64008" cy="0"/>
+          </a:xfrm>
+          <a:prstGeom prst="line">
+            <a:avLst/>
+          </a:prstGeom>
+          <a:ln w="12700">
+            <a:solidFill>
+              <a:srgbClr val="B4C7D2"/>
+            </a:solidFill>
+          </a:ln>
+          <a:effectLst/>
+        </p:spPr>
+      </p:cxnSp>
+      <p:cxnSp>
+        <p:nvCxnSpPr>
+          <p:cNvPr id="56" name="C2-E02 line 54" descr="sci-ppt:o054"/>
+          <p:cNvCxnSpPr/>
+          <p:nvPr/>
+        </p:nvCxnSpPr>
+        <p:spPr>
+          <a:xfrm>
+            <a:off x="6675120" y="4158342"/>
+            <a:ext cx="5120639" cy="0"/>
+          </a:xfrm>
+          <a:prstGeom prst="line">
+            <a:avLst/>
+          </a:prstGeom>
+          <a:ln w="7620">
+            <a:solidFill>
+              <a:srgbClr val="2E4756"/>
+            </a:solidFill>
+          </a:ln>
+          <a:effectLst/>
+        </p:spPr>
+      </p:cxnSp>
+      <p:sp>
+        <p:nvSpPr>
+          <p:cNvPr id="57" name="C2-E02 text 55" descr="sci-ppt:o055"/>
+          <p:cNvSpPr txBox="1"/>
+          <p:nvPr/>
+        </p:nvSpPr>
+        <p:spPr>
+          <a:xfrm>
+            <a:off x="5806440" y="4076046"/>
+            <a:ext cx="777240" cy="208407"/>
+          </a:xfrm>
+          <a:prstGeom prst="rect">
+            <a:avLst/>
+          </a:prstGeom>
+          <a:noFill/>
+          <a:effectLst/>
+        </p:spPr>
+        <p:txBody>
+          <a:bodyPr wrap="none" lIns="18288" rIns="18288" tIns="18288" bIns="18288" anchor="t">
+            <a:spAutoFit/>
+          </a:bodyPr>
+          <a:lstStyle/>
+          <a:p>
+            <a:pPr algn="r">
+              <a:spcAft>
+                <a:spcPts val="0"/>
+              </a:spcAft>
+            </a:pPr>
+            <a:r>
+              <a:rPr sz="1050" b="0" i="0">
+                <a:solidFill>
+                  <a:srgbClr val="B4C7D2"/>
+                </a:solidFill>
+                <a:latin typeface="Arial"/>
+              </a:rPr>
+              <a:t>0.25</a:t>
+            </a:r>
+          </a:p>
+        </p:txBody>
+      </p:sp>
+      <p:cxnSp>
+        <p:nvCxnSpPr>
+          <p:cNvPr id="58" name="C2-E02 line 56" descr="sci-ppt:o056"/>
+          <p:cNvCxnSpPr/>
+          <p:nvPr/>
+        </p:nvCxnSpPr>
+        <p:spPr>
+          <a:xfrm>
+            <a:off x="6611112" y="3287485"/>
+            <a:ext cx="64008" cy="0"/>
+          </a:xfrm>
+          <a:prstGeom prst="line">
+            <a:avLst/>
+          </a:prstGeom>
+          <a:ln w="12700">
+            <a:solidFill>
+              <a:srgbClr val="B4C7D2"/>
+            </a:solidFill>
+          </a:ln>
+          <a:effectLst/>
+        </p:spPr>
+      </p:cxnSp>
+      <p:cxnSp>
+        <p:nvCxnSpPr>
+          <p:cNvPr id="59" name="C2-E02 line 57" descr="sci-ppt:o057"/>
+          <p:cNvCxnSpPr/>
+          <p:nvPr/>
+        </p:nvCxnSpPr>
+        <p:spPr>
+          <a:xfrm>
+            <a:off x="6675120" y="3287485"/>
+            <a:ext cx="5120639" cy="0"/>
+          </a:xfrm>
+          <a:prstGeom prst="line">
+            <a:avLst/>
+          </a:prstGeom>
+          <a:ln w="7620">
+            <a:solidFill>
+              <a:srgbClr val="2E4756"/>
+            </a:solidFill>
+          </a:ln>
+          <a:effectLst/>
+        </p:spPr>
+      </p:cxnSp>
+      <p:sp>
+        <p:nvSpPr>
+          <p:cNvPr id="60" name="C2-E02 text 58" descr="sci-ppt:o058"/>
+          <p:cNvSpPr txBox="1"/>
+          <p:nvPr/>
+        </p:nvSpPr>
+        <p:spPr>
+          <a:xfrm>
+            <a:off x="5806440" y="3205189"/>
+            <a:ext cx="777240" cy="208407"/>
+          </a:xfrm>
+          <a:prstGeom prst="rect">
+            <a:avLst/>
+          </a:prstGeom>
+          <a:noFill/>
+          <a:effectLst/>
+        </p:spPr>
+        <p:txBody>
+          <a:bodyPr wrap="none" lIns="18288" rIns="18288" tIns="18288" bIns="18288" anchor="t">
+            <a:spAutoFit/>
+          </a:bodyPr>
+          <a:lstStyle/>
+          <a:p>
+            <a:pPr algn="r">
+              <a:spcAft>
+                <a:spcPts val="0"/>
+              </a:spcAft>
+            </a:pPr>
+            <a:r>
+              <a:rPr sz="1050" b="0" i="0">
+                <a:solidFill>
+                  <a:srgbClr val="B4C7D2"/>
+                </a:solidFill>
+                <a:latin typeface="Arial"/>
+              </a:rPr>
+              <a:t>0.50</a:t>
+            </a:r>
+          </a:p>
+        </p:txBody>
+      </p:sp>
+      <p:cxnSp>
+        <p:nvCxnSpPr>
+          <p:cNvPr id="61" name="C2-E02 line 59" descr="sci-ppt:o059"/>
+          <p:cNvCxnSpPr/>
+          <p:nvPr/>
+        </p:nvCxnSpPr>
+        <p:spPr>
+          <a:xfrm>
+            <a:off x="6611112" y="2416628"/>
+            <a:ext cx="64008" cy="0"/>
+          </a:xfrm>
+          <a:prstGeom prst="line">
+            <a:avLst/>
+          </a:prstGeom>
+          <a:ln w="12700">
+            <a:solidFill>
+              <a:srgbClr val="B4C7D2"/>
+            </a:solidFill>
+          </a:ln>
+          <a:effectLst/>
+        </p:spPr>
+      </p:cxnSp>
+      <p:cxnSp>
+        <p:nvCxnSpPr>
+          <p:cNvPr id="62" name="C2-E02 line 60" descr="sci-ppt:o060"/>
+          <p:cNvCxnSpPr/>
+          <p:nvPr/>
+        </p:nvCxnSpPr>
+        <p:spPr>
+          <a:xfrm>
+            <a:off x="6675120" y="2416628"/>
+            <a:ext cx="5120639" cy="0"/>
+          </a:xfrm>
+          <a:prstGeom prst="line">
+            <a:avLst/>
+          </a:prstGeom>
+          <a:ln w="7620">
+            <a:solidFill>
+              <a:srgbClr val="2E4756"/>
+            </a:solidFill>
+          </a:ln>
+          <a:effectLst/>
+        </p:spPr>
+      </p:cxnSp>
+      <p:sp>
+        <p:nvSpPr>
+          <p:cNvPr id="63" name="C2-E02 text 61" descr="sci-ppt:o061"/>
+          <p:cNvSpPr txBox="1"/>
+          <p:nvPr/>
+        </p:nvSpPr>
+        <p:spPr>
+          <a:xfrm>
+            <a:off x="5806440" y="2334332"/>
+            <a:ext cx="777240" cy="208407"/>
+          </a:xfrm>
+          <a:prstGeom prst="rect">
+            <a:avLst/>
+          </a:prstGeom>
+          <a:noFill/>
+          <a:effectLst/>
+        </p:spPr>
+        <p:txBody>
+          <a:bodyPr wrap="none" lIns="18288" rIns="18288" tIns="18288" bIns="18288" anchor="t">
+            <a:spAutoFit/>
+          </a:bodyPr>
+          <a:lstStyle/>
+          <a:p>
+            <a:pPr algn="r">
+              <a:spcAft>
+                <a:spcPts val="0"/>
+              </a:spcAft>
+            </a:pPr>
+            <a:r>
+              <a:rPr sz="1050" b="0" i="0">
+                <a:solidFill>
+                  <a:srgbClr val="B4C7D2"/>
+                </a:solidFill>
+                <a:latin typeface="Arial"/>
+              </a:rPr>
+              <a:t>0.75</a:t>
+            </a:r>
+          </a:p>
+        </p:txBody>
+      </p:sp>
+      <p:cxnSp>
+        <p:nvCxnSpPr>
+          <p:cNvPr id="64" name="C2-E02 line 62" descr="sci-ppt:o062"/>
+          <p:cNvCxnSpPr/>
+          <p:nvPr/>
+        </p:nvCxnSpPr>
+        <p:spPr>
+          <a:xfrm>
+            <a:off x="6611112" y="1545771"/>
+            <a:ext cx="64008" cy="0"/>
+          </a:xfrm>
+          <a:prstGeom prst="line">
+            <a:avLst/>
+          </a:prstGeom>
+          <a:ln w="12700">
+            <a:solidFill>
+              <a:srgbClr val="B4C7D2"/>
+            </a:solidFill>
+          </a:ln>
+          <a:effectLst/>
+        </p:spPr>
+      </p:cxnSp>
+      <p:cxnSp>
+        <p:nvCxnSpPr>
+          <p:cNvPr id="65" name="C2-E02 line 63" descr="sci-ppt:o063"/>
+          <p:cNvCxnSpPr/>
+          <p:nvPr/>
+        </p:nvCxnSpPr>
+        <p:spPr>
+          <a:xfrm>
+            <a:off x="6675120" y="1545771"/>
+            <a:ext cx="5120639" cy="0"/>
+          </a:xfrm>
+          <a:prstGeom prst="line">
+            <a:avLst/>
+          </a:prstGeom>
+          <a:ln w="7620">
+            <a:solidFill>
+              <a:srgbClr val="2E4756"/>
+            </a:solidFill>
+          </a:ln>
+          <a:effectLst/>
+        </p:spPr>
+      </p:cxnSp>
+      <p:sp>
+        <p:nvSpPr>
+          <p:cNvPr id="66" name="C2-E02 text 64" descr="sci-ppt:o064"/>
+          <p:cNvSpPr txBox="1"/>
+          <p:nvPr/>
+        </p:nvSpPr>
+        <p:spPr>
+          <a:xfrm>
+            <a:off x="5806440" y="1463475"/>
+            <a:ext cx="777240" cy="208407"/>
+          </a:xfrm>
+          <a:prstGeom prst="rect">
+            <a:avLst/>
+          </a:prstGeom>
+          <a:noFill/>
+          <a:effectLst/>
+        </p:spPr>
+        <p:txBody>
+          <a:bodyPr wrap="none" lIns="18288" rIns="18288" tIns="18288" bIns="18288" anchor="t">
+            <a:spAutoFit/>
+          </a:bodyPr>
+          <a:lstStyle/>
+          <a:p>
+            <a:pPr algn="r">
+              <a:spcAft>
+                <a:spcPts val="0"/>
+              </a:spcAft>
+            </a:pPr>
+            <a:r>
+              <a:rPr sz="1050" b="0" i="0">
+                <a:solidFill>
+                  <a:srgbClr val="B4C7D2"/>
+                </a:solidFill>
+                <a:latin typeface="Arial"/>
+              </a:rPr>
+              <a:t>1.00</a:t>
+            </a:r>
+          </a:p>
+        </p:txBody>
+      </p:sp>
+      <p:sp>
+        <p:nvSpPr>
+          <p:cNvPr id="67" name="C2-E02 text 65" descr="sci-ppt:o065"/>
+          <p:cNvSpPr txBox="1"/>
+          <p:nvPr/>
+        </p:nvSpPr>
+        <p:spPr>
+          <a:xfrm>
+            <a:off x="6675120" y="5312664"/>
+            <a:ext cx="5120640" cy="231648"/>
+          </a:xfrm>
+          <a:prstGeom prst="rect">
+            <a:avLst/>
+          </a:prstGeom>
+          <a:noFill/>
+          <a:effectLst/>
+        </p:spPr>
+        <p:txBody>
+          <a:bodyPr wrap="none" lIns="18288" rIns="18288" tIns="18288" bIns="18288" anchor="t">
+            <a:spAutoFit/>
+          </a:bodyPr>
+          <a:lstStyle/>
+          <a:p>
+            <a:pPr algn="ctr">
+              <a:spcAft>
+                <a:spcPts val="0"/>
+              </a:spcAft>
+            </a:pPr>
+            <a:r>
+              <a:rPr sz="1200" b="0" i="0">
+                <a:solidFill>
+                  <a:srgbClr val="E7F0F3"/>
+                </a:solidFill>
+                <a:latin typeface="Arial"/>
+              </a:rPr>
+              <a:t>r / w</a:t>
+            </a:r>
+          </a:p>
+        </p:txBody>
+      </p:sp>
+      <p:sp>
+        <p:nvSpPr>
+          <p:cNvPr id="68" name="C2-E02 text 66" descr="sci-ppt:o066"/>
+          <p:cNvSpPr txBox="1"/>
+          <p:nvPr/>
+        </p:nvSpPr>
+        <p:spPr>
+          <a:xfrm>
+            <a:off x="6126480" y="1024128"/>
+            <a:ext cx="5120640" cy="231648"/>
+          </a:xfrm>
+          <a:prstGeom prst="rect">
+            <a:avLst/>
+          </a:prstGeom>
+          <a:noFill/>
+          <a:effectLst/>
+        </p:spPr>
+        <p:txBody>
+          <a:bodyPr wrap="none" lIns="18288" rIns="18288" tIns="18288" bIns="18288" anchor="t">
+            <a:spAutoFit/>
+          </a:bodyPr>
+          <a:lstStyle/>
+          <a:p>
+            <a:pPr algn="l">
+              <a:spcAft>
+                <a:spcPts val="0"/>
+              </a:spcAft>
+            </a:pPr>
+            <a:r>
+              <a:rPr sz="1200" b="0" i="0">
+                <a:solidFill>
+                  <a:srgbClr val="E7F0F3"/>
+                </a:solidFill>
+                <a:latin typeface="Arial"/>
+              </a:rPr>
+              <a:t>energy inside r  /  E_L</a:t>
+            </a:r>
+          </a:p>
+        </p:txBody>
+      </p:sp>
+      <p:sp>
+        <p:nvSpPr>
+          <p:cNvPr id="69" name="C2-E02 polygon 67" descr="sci-ppt:o067"/>
+          <p:cNvSpPr/>
+          <p:nvPr/>
+        </p:nvSpPr>
+        <p:spPr>
+          <a:xfrm>
+            <a:off x="6675120" y="1545806"/>
+            <a:ext cx="5120639" cy="3483394"/>
+          </a:xfrm>
+          <a:custGeom>
+            <a:avLst/>
+            <a:gdLst/>
+            <a:ahLst/>
+            <a:cxnLst/>
+            <a:rect l="l" t="t" r="r" b="b"/>
+            <a:pathLst>
+              <a:path w="5120639" h="3483394">
+                <a:moveTo>
+                  <a:pt x="0" y="3483394"/>
+                </a:moveTo>
+                <a:lnTo>
+                  <a:pt x="34251" y="3481598"/>
+                </a:lnTo>
+                <a:lnTo>
+                  <a:pt x="68503" y="3476219"/>
+                </a:lnTo>
+                <a:lnTo>
+                  <a:pt x="102755" y="3467272"/>
+                </a:lnTo>
+                <a:lnTo>
+                  <a:pt x="137007" y="3454784"/>
+                </a:lnTo>
+                <a:lnTo>
+                  <a:pt x="171258" y="3438795"/>
+                </a:lnTo>
+                <a:lnTo>
+                  <a:pt x="205510" y="3419353"/>
+                </a:lnTo>
+                <a:lnTo>
+                  <a:pt x="239762" y="3396517"/>
+                </a:lnTo>
+                <a:lnTo>
+                  <a:pt x="274014" y="3370358"/>
+                </a:lnTo>
+                <a:lnTo>
+                  <a:pt x="308265" y="3340955"/>
+                </a:lnTo>
+                <a:lnTo>
+                  <a:pt x="342517" y="3308396"/>
+                </a:lnTo>
+                <a:lnTo>
+                  <a:pt x="376769" y="3272778"/>
+                </a:lnTo>
+                <a:lnTo>
+                  <a:pt x="411021" y="3234208"/>
+                </a:lnTo>
+                <a:lnTo>
+                  <a:pt x="445273" y="3192800"/>
+                </a:lnTo>
+                <a:lnTo>
+                  <a:pt x="479524" y="3148674"/>
+                </a:lnTo>
+                <a:lnTo>
+                  <a:pt x="513776" y="3101959"/>
+                </a:lnTo>
+                <a:lnTo>
+                  <a:pt x="548028" y="3052788"/>
+                </a:lnTo>
+                <a:lnTo>
+                  <a:pt x="582280" y="3001301"/>
+                </a:lnTo>
+                <a:lnTo>
+                  <a:pt x="616531" y="2947642"/>
+                </a:lnTo>
+                <a:lnTo>
+                  <a:pt x="650783" y="2891960"/>
+                </a:lnTo>
+                <a:lnTo>
+                  <a:pt x="685035" y="2834406"/>
+                </a:lnTo>
+                <a:lnTo>
+                  <a:pt x="719287" y="2775135"/>
+                </a:lnTo>
+                <a:lnTo>
+                  <a:pt x="753538" y="2714305"/>
+                </a:lnTo>
+                <a:lnTo>
+                  <a:pt x="787790" y="2652072"/>
+                </a:lnTo>
+                <a:lnTo>
+                  <a:pt x="822042" y="2588596"/>
+                </a:lnTo>
+                <a:lnTo>
+                  <a:pt x="856294" y="2524036"/>
+                </a:lnTo>
+                <a:lnTo>
+                  <a:pt x="890546" y="2458550"/>
+                </a:lnTo>
+                <a:lnTo>
+                  <a:pt x="924797" y="2392296"/>
+                </a:lnTo>
+                <a:lnTo>
+                  <a:pt x="959049" y="2325429"/>
+                </a:lnTo>
+                <a:lnTo>
+                  <a:pt x="993301" y="2258102"/>
+                </a:lnTo>
+                <a:lnTo>
+                  <a:pt x="1027553" y="2190464"/>
+                </a:lnTo>
+                <a:lnTo>
+                  <a:pt x="1061804" y="2122664"/>
+                </a:lnTo>
+                <a:lnTo>
+                  <a:pt x="1096056" y="2054842"/>
+                </a:lnTo>
+                <a:lnTo>
+                  <a:pt x="1130308" y="1987138"/>
+                </a:lnTo>
+                <a:lnTo>
+                  <a:pt x="1164560" y="1919685"/>
+                </a:lnTo>
+                <a:lnTo>
+                  <a:pt x="1198812" y="1852611"/>
+                </a:lnTo>
+                <a:lnTo>
+                  <a:pt x="1233063" y="1786038"/>
+                </a:lnTo>
+                <a:lnTo>
+                  <a:pt x="1267315" y="1720083"/>
+                </a:lnTo>
+                <a:lnTo>
+                  <a:pt x="1301567" y="1654856"/>
+                </a:lnTo>
+                <a:lnTo>
+                  <a:pt x="1335819" y="1590463"/>
+                </a:lnTo>
+                <a:lnTo>
+                  <a:pt x="1370070" y="1527000"/>
+                </a:lnTo>
+                <a:lnTo>
+                  <a:pt x="1404322" y="1464559"/>
+                </a:lnTo>
+                <a:lnTo>
+                  <a:pt x="1438574" y="1403224"/>
+                </a:lnTo>
+                <a:lnTo>
+                  <a:pt x="1472826" y="1343073"/>
+                </a:lnTo>
+                <a:lnTo>
+                  <a:pt x="1507077" y="1284175"/>
+                </a:lnTo>
+                <a:lnTo>
+                  <a:pt x="1541329" y="1226595"/>
+                </a:lnTo>
+                <a:lnTo>
+                  <a:pt x="1575581" y="1170389"/>
+                </a:lnTo>
+                <a:lnTo>
+                  <a:pt x="1609833" y="1115608"/>
+                </a:lnTo>
+                <a:lnTo>
+                  <a:pt x="1644085" y="1062296"/>
+                </a:lnTo>
+                <a:lnTo>
+                  <a:pt x="1678336" y="1010488"/>
+                </a:lnTo>
+                <a:lnTo>
+                  <a:pt x="1712588" y="960217"/>
+                </a:lnTo>
+                <a:lnTo>
+                  <a:pt x="1746840" y="911507"/>
+                </a:lnTo>
+                <a:lnTo>
+                  <a:pt x="1781092" y="864376"/>
+                </a:lnTo>
+                <a:lnTo>
+                  <a:pt x="1815343" y="818837"/>
+                </a:lnTo>
+                <a:lnTo>
+                  <a:pt x="1849595" y="774898"/>
+                </a:lnTo>
+                <a:lnTo>
+                  <a:pt x="1883847" y="732561"/>
+                </a:lnTo>
+                <a:lnTo>
+                  <a:pt x="1918099" y="691824"/>
+                </a:lnTo>
+                <a:lnTo>
+                  <a:pt x="1952351" y="652679"/>
+                </a:lnTo>
+                <a:lnTo>
+                  <a:pt x="1986602" y="615114"/>
+                </a:lnTo>
+                <a:lnTo>
+                  <a:pt x="2020854" y="579113"/>
+                </a:lnTo>
+                <a:lnTo>
+                  <a:pt x="2055106" y="544658"/>
+                </a:lnTo>
+                <a:lnTo>
+                  <a:pt x="2089358" y="511725"/>
+                </a:lnTo>
+                <a:lnTo>
+                  <a:pt x="2123609" y="480287"/>
+                </a:lnTo>
+                <a:lnTo>
+                  <a:pt x="2157861" y="450317"/>
+                </a:lnTo>
+                <a:lnTo>
+                  <a:pt x="2192113" y="421781"/>
+                </a:lnTo>
+                <a:lnTo>
+                  <a:pt x="2226365" y="394646"/>
+                </a:lnTo>
+                <a:lnTo>
+                  <a:pt x="2260616" y="368877"/>
+                </a:lnTo>
+                <a:lnTo>
+                  <a:pt x="2294868" y="344434"/>
+                </a:lnTo>
+                <a:lnTo>
+                  <a:pt x="2329120" y="321280"/>
+                </a:lnTo>
+                <a:lnTo>
+                  <a:pt x="2363372" y="299373"/>
+                </a:lnTo>
+                <a:lnTo>
+                  <a:pt x="2397624" y="278672"/>
+                </a:lnTo>
+                <a:lnTo>
+                  <a:pt x="2431875" y="259136"/>
+                </a:lnTo>
+                <a:lnTo>
+                  <a:pt x="2466127" y="240720"/>
+                </a:lnTo>
+                <a:lnTo>
+                  <a:pt x="2500379" y="223383"/>
+                </a:lnTo>
+                <a:lnTo>
+                  <a:pt x="2534631" y="207080"/>
+                </a:lnTo>
+                <a:lnTo>
+                  <a:pt x="2568882" y="191769"/>
+                </a:lnTo>
+                <a:lnTo>
+                  <a:pt x="2603134" y="177407"/>
+                </a:lnTo>
+                <a:lnTo>
+                  <a:pt x="2637386" y="163952"/>
+                </a:lnTo>
+                <a:lnTo>
+                  <a:pt x="2671638" y="151360"/>
+                </a:lnTo>
+                <a:lnTo>
+                  <a:pt x="2705890" y="139591"/>
+                </a:lnTo>
+                <a:lnTo>
+                  <a:pt x="2740141" y="128605"/>
+                </a:lnTo>
+                <a:lnTo>
+                  <a:pt x="2774393" y="118361"/>
+                </a:lnTo>
+                <a:lnTo>
+                  <a:pt x="2808645" y="108820"/>
+                </a:lnTo>
+                <a:lnTo>
+                  <a:pt x="2842897" y="99945"/>
+                </a:lnTo>
+                <a:lnTo>
+                  <a:pt x="2877148" y="91699"/>
+                </a:lnTo>
+                <a:lnTo>
+                  <a:pt x="2911400" y="84046"/>
+                </a:lnTo>
+                <a:lnTo>
+                  <a:pt x="2945652" y="76953"/>
+                </a:lnTo>
+                <a:lnTo>
+                  <a:pt x="2979904" y="70385"/>
+                </a:lnTo>
+                <a:lnTo>
+                  <a:pt x="3014155" y="64311"/>
+                </a:lnTo>
+                <a:lnTo>
+                  <a:pt x="3048407" y="58701"/>
+                </a:lnTo>
+                <a:lnTo>
+                  <a:pt x="3082659" y="53524"/>
+                </a:lnTo>
+                <a:lnTo>
+                  <a:pt x="3116911" y="48753"/>
+                </a:lnTo>
+                <a:lnTo>
+                  <a:pt x="3151163" y="44362"/>
+                </a:lnTo>
+                <a:lnTo>
+                  <a:pt x="3185414" y="40324"/>
+                </a:lnTo>
+                <a:lnTo>
+                  <a:pt x="3219666" y="36615"/>
+                </a:lnTo>
+                <a:lnTo>
+                  <a:pt x="3253918" y="33214"/>
+                </a:lnTo>
+                <a:lnTo>
+                  <a:pt x="3288170" y="30096"/>
+                </a:lnTo>
+                <a:lnTo>
+                  <a:pt x="3322421" y="27243"/>
+                </a:lnTo>
+                <a:lnTo>
+                  <a:pt x="3356673" y="24635"/>
+                </a:lnTo>
+                <a:lnTo>
+                  <a:pt x="3390925" y="22253"/>
+                </a:lnTo>
+                <a:lnTo>
+                  <a:pt x="3425177" y="20080"/>
+                </a:lnTo>
+                <a:lnTo>
+                  <a:pt x="3459429" y="18100"/>
+                </a:lnTo>
+                <a:lnTo>
+                  <a:pt x="3493680" y="16299"/>
+                </a:lnTo>
+                <a:lnTo>
+                  <a:pt x="3527932" y="14661"/>
+                </a:lnTo>
+                <a:lnTo>
+                  <a:pt x="3562184" y="13174"/>
+                </a:lnTo>
+                <a:lnTo>
+                  <a:pt x="3596436" y="11825"/>
+                </a:lnTo>
+                <a:lnTo>
+                  <a:pt x="3630687" y="10603"/>
+                </a:lnTo>
+                <a:lnTo>
+                  <a:pt x="3664939" y="9496"/>
+                </a:lnTo>
+                <a:lnTo>
+                  <a:pt x="3699191" y="8497"/>
+                </a:lnTo>
+                <a:lnTo>
+                  <a:pt x="3733443" y="7594"/>
+                </a:lnTo>
+                <a:lnTo>
+                  <a:pt x="3767694" y="6780"/>
+                </a:lnTo>
+                <a:lnTo>
+                  <a:pt x="3801946" y="6046"/>
+                </a:lnTo>
+                <a:lnTo>
+                  <a:pt x="3836198" y="5386"/>
+                </a:lnTo>
+                <a:lnTo>
+                  <a:pt x="3870450" y="4792"/>
+                </a:lnTo>
+                <a:lnTo>
+                  <a:pt x="3904702" y="4259"/>
+                </a:lnTo>
+                <a:lnTo>
+                  <a:pt x="3938953" y="3781"/>
+                </a:lnTo>
+                <a:lnTo>
+                  <a:pt x="3973205" y="3353"/>
+                </a:lnTo>
+                <a:lnTo>
+                  <a:pt x="4007457" y="2969"/>
+                </a:lnTo>
+                <a:lnTo>
+                  <a:pt x="4041709" y="2627"/>
+                </a:lnTo>
+                <a:lnTo>
+                  <a:pt x="4075960" y="2320"/>
+                </a:lnTo>
+                <a:lnTo>
+                  <a:pt x="4110212" y="2047"/>
+                </a:lnTo>
+                <a:lnTo>
+                  <a:pt x="4144464" y="1804"/>
+                </a:lnTo>
+                <a:lnTo>
+                  <a:pt x="4178716" y="1588"/>
+                </a:lnTo>
+                <a:lnTo>
+                  <a:pt x="4212968" y="1395"/>
+                </a:lnTo>
+                <a:lnTo>
+                  <a:pt x="4247219" y="1224"/>
+                </a:lnTo>
+                <a:lnTo>
+                  <a:pt x="4281471" y="1073"/>
+                </a:lnTo>
+                <a:lnTo>
+                  <a:pt x="4315723" y="938"/>
+                </a:lnTo>
+                <a:lnTo>
+                  <a:pt x="4349975" y="819"/>
+                </a:lnTo>
+                <a:lnTo>
+                  <a:pt x="4384226" y="714"/>
+                </a:lnTo>
+                <a:lnTo>
+                  <a:pt x="4418478" y="621"/>
+                </a:lnTo>
+                <a:lnTo>
+                  <a:pt x="4452730" y="539"/>
+                </a:lnTo>
+                <a:lnTo>
+                  <a:pt x="4486982" y="467"/>
+                </a:lnTo>
+                <a:lnTo>
+                  <a:pt x="4521233" y="403"/>
+                </a:lnTo>
+                <a:lnTo>
+                  <a:pt x="4555485" y="347"/>
+                </a:lnTo>
+                <a:lnTo>
+                  <a:pt x="4589737" y="298"/>
+                </a:lnTo>
+                <a:lnTo>
+                  <a:pt x="4623989" y="255"/>
+                </a:lnTo>
+                <a:lnTo>
+                  <a:pt x="4658241" y="217"/>
+                </a:lnTo>
+                <a:lnTo>
+                  <a:pt x="4692492" y="184"/>
+                </a:lnTo>
+                <a:lnTo>
+                  <a:pt x="4726744" y="155"/>
+                </a:lnTo>
+                <a:lnTo>
+                  <a:pt x="4760996" y="130"/>
+                </a:lnTo>
+                <a:lnTo>
+                  <a:pt x="4795248" y="108"/>
+                </a:lnTo>
+                <a:lnTo>
+                  <a:pt x="4829499" y="88"/>
+                </a:lnTo>
+                <a:lnTo>
+                  <a:pt x="4863751" y="72"/>
+                </a:lnTo>
+                <a:lnTo>
+                  <a:pt x="4898003" y="57"/>
+                </a:lnTo>
+                <a:lnTo>
+                  <a:pt x="4932255" y="44"/>
+                </a:lnTo>
+                <a:lnTo>
+                  <a:pt x="4966507" y="33"/>
+                </a:lnTo>
+                <a:lnTo>
+                  <a:pt x="5000758" y="24"/>
+                </a:lnTo>
+                <a:lnTo>
+                  <a:pt x="5035010" y="16"/>
+                </a:lnTo>
+                <a:lnTo>
+                  <a:pt x="5069262" y="8"/>
+                </a:lnTo>
+                <a:lnTo>
+                  <a:pt x="5103514" y="2"/>
+                </a:lnTo>
+                <a:lnTo>
+                  <a:pt x="5120639" y="0"/>
+                </a:lnTo>
+              </a:path>
+            </a:pathLst>
+          </a:custGeom>
+          <a:noFill/>
+          <a:ln w="38100">
+            <a:solidFill>
+              <a:srgbClr val="F2B880"/>
+            </a:solidFill>
+          </a:ln>
+          <a:effectLst/>
+        </p:spPr>
+        <p:txBody>
+          <a:bodyPr rtlCol="0" anchor="ctr"/>
+          <a:lstStyle/>
+          <a:p>
+            <a:pPr algn="ctr"/>
+          </a:p>
+        </p:txBody>
+      </p:sp>
+      <p:sp>
+        <p:nvSpPr>
+          <p:cNvPr id="70" name="C2-E02 ellipse 68" descr="sci-ppt:o068"/>
+          <p:cNvSpPr/>
+          <p:nvPr/>
+        </p:nvSpPr>
+        <p:spPr>
+          <a:xfrm>
+            <a:off x="7668768" y="3585425"/>
+            <a:ext cx="146304" cy="146304"/>
+          </a:xfrm>
+          <a:prstGeom prst="ellipse">
+            <a:avLst/>
+          </a:prstGeom>
+          <a:solidFill>
+            <a:srgbClr val="8EDBD4"/>
+          </a:solidFill>
+          <a:ln w="12700">
             <a:solidFill>
               <a:srgbClr val="8EDBD4"/>
             </a:solidFill>
           </a:ln>
           <a:effectLst/>
         </p:spPr>
-      </p:cxnSp>
-      <p:cxnSp>
-        <p:nvCxnSpPr>
-          <p:cNvPr id="14" name="line13" descr="sci-ppt:C2-E02-013"/>
-          <p:cNvCxnSpPr/>
+        <p:txBody>
+          <a:bodyPr rtlCol="0" anchor="ctr"/>
+          <a:lstStyle/>
+          <a:p>
+            <a:pPr algn="ctr"/>
+          </a:p>
+        </p:txBody>
+      </p:sp>
+      <p:sp>
+        <p:nvSpPr>
+          <p:cNvPr id="71" name="C2-E02 text 69" descr="sci-ppt:o069"/>
+          <p:cNvSpPr txBox="1"/>
           <p:nvPr/>
-        </p:nvCxnSpPr>
-        <p:spPr>
-          <a:xfrm>
-            <a:off x="6851904" y="1572283"/>
-            <a:ext cx="103632" cy="59012"/>
-          </a:xfrm>
-          <a:prstGeom prst="line">
+        </p:nvSpPr>
+        <p:spPr>
+          <a:xfrm>
+            <a:off x="7851647" y="3704297"/>
+            <a:ext cx="2011680" cy="231648"/>
+          </a:xfrm>
+          <a:prstGeom prst="rect">
             <a:avLst/>
           </a:prstGeom>
-          <a:ln w="25400">
+          <a:noFill/>
+          <a:effectLst/>
+        </p:spPr>
+        <p:txBody>
+          <a:bodyPr wrap="none" lIns="18288" rIns="18288" tIns="18288" bIns="18288" anchor="t">
+            <a:spAutoFit/>
+          </a:bodyPr>
+          <a:lstStyle/>
+          <a:p>
+            <a:pPr algn="l">
+              <a:spcAft>
+                <a:spcPts val="0"/>
+              </a:spcAft>
+            </a:pPr>
+            <a:r>
+              <a:rPr sz="1200" b="0" i="0">
+                <a:solidFill>
+                  <a:srgbClr val="8EDBD4"/>
+                </a:solidFill>
+                <a:latin typeface="Arial"/>
+              </a:rPr>
+              <a:t>39 % inside w/2</a:t>
+            </a:r>
+          </a:p>
+        </p:txBody>
+      </p:sp>
+      <p:sp>
+        <p:nvSpPr>
+          <p:cNvPr id="72" name="C2-E02 ellipse 70" descr="sci-ppt:o070"/>
+          <p:cNvSpPr/>
+          <p:nvPr/>
+        </p:nvSpPr>
+        <p:spPr>
+          <a:xfrm>
+            <a:off x="8735568" y="1944050"/>
+            <a:ext cx="146304" cy="146304"/>
+          </a:xfrm>
+          <a:prstGeom prst="ellipse">
+            <a:avLst/>
+          </a:prstGeom>
+          <a:solidFill>
+            <a:srgbClr val="8EDBD4"/>
+          </a:solidFill>
+          <a:ln w="12700">
             <a:solidFill>
               <a:srgbClr val="8EDBD4"/>
             </a:solidFill>
           </a:ln>
           <a:effectLst/>
         </p:spPr>
-      </p:cxnSp>
-      <p:cxnSp>
-        <p:nvCxnSpPr>
-          <p:cNvPr id="15" name="line14" descr="sci-ppt:C2-E02-014"/>
-          <p:cNvCxnSpPr/>
-          <p:nvPr/>
-        </p:nvCxnSpPr>
-        <p:spPr>
-          <a:xfrm>
-            <a:off x="6955536" y="1631295"/>
-            <a:ext cx="103632" cy="80178"/>
-          </a:xfrm>
-          <a:prstGeom prst="line">
-            <a:avLst/>
-          </a:prstGeom>
-          <a:ln w="25400">
-            <a:solidFill>
-              <a:srgbClr val="8EDBD4"/>
-            </a:solidFill>
-          </a:ln>
-          <a:effectLst/>
-        </p:spPr>
-      </p:cxnSp>
-      <p:cxnSp>
-        <p:nvCxnSpPr>
-          <p:cNvPr id="16" name="line15" descr="sci-ppt:C2-E02-015"/>
-          <p:cNvCxnSpPr/>
-          <p:nvPr/>
-        </p:nvCxnSpPr>
-        <p:spPr>
-          <a:xfrm>
-            <a:off x="7059168" y="1711473"/>
-            <a:ext cx="103632" cy="99046"/>
-          </a:xfrm>
-          <a:prstGeom prst="line">
-            <a:avLst/>
-          </a:prstGeom>
-          <a:ln w="25400">
-            <a:solidFill>
-              <a:srgbClr val="8EDBD4"/>
-            </a:solidFill>
-          </a:ln>
-          <a:effectLst/>
-        </p:spPr>
-      </p:cxnSp>
-      <p:cxnSp>
-        <p:nvCxnSpPr>
-          <p:cNvPr id="17" name="line16" descr="sci-ppt:C2-E02-016"/>
-          <p:cNvCxnSpPr/>
-          <p:nvPr/>
-        </p:nvCxnSpPr>
-        <p:spPr>
-          <a:xfrm>
-            <a:off x="7162800" y="1810519"/>
-            <a:ext cx="103632" cy="115158"/>
-          </a:xfrm>
-          <a:prstGeom prst="line">
-            <a:avLst/>
-          </a:prstGeom>
-          <a:ln w="25400">
-            <a:solidFill>
-              <a:srgbClr val="8EDBD4"/>
-            </a:solidFill>
-          </a:ln>
-          <a:effectLst/>
-        </p:spPr>
-      </p:cxnSp>
-      <p:cxnSp>
-        <p:nvCxnSpPr>
-          <p:cNvPr id="18" name="line17" descr="sci-ppt:C2-E02-017"/>
-          <p:cNvCxnSpPr/>
-          <p:nvPr/>
-        </p:nvCxnSpPr>
-        <p:spPr>
-          <a:xfrm>
-            <a:off x="7266432" y="1925677"/>
-            <a:ext cx="103632" cy="128176"/>
-          </a:xfrm>
-          <a:prstGeom prst="line">
-            <a:avLst/>
-          </a:prstGeom>
-          <a:ln w="25400">
-            <a:solidFill>
-              <a:srgbClr val="8EDBD4"/>
-            </a:solidFill>
-          </a:ln>
-          <a:effectLst/>
-        </p:spPr>
-      </p:cxnSp>
-      <p:cxnSp>
-        <p:nvCxnSpPr>
-          <p:cNvPr id="19" name="line18" descr="sci-ppt:C2-E02-018"/>
-          <p:cNvCxnSpPr/>
-          <p:nvPr/>
-        </p:nvCxnSpPr>
-        <p:spPr>
-          <a:xfrm>
-            <a:off x="7370064" y="2053853"/>
-            <a:ext cx="103632" cy="137905"/>
-          </a:xfrm>
-          <a:prstGeom prst="line">
-            <a:avLst/>
-          </a:prstGeom>
-          <a:ln w="25400">
-            <a:solidFill>
-              <a:srgbClr val="8EDBD4"/>
-            </a:solidFill>
-          </a:ln>
-          <a:effectLst/>
-        </p:spPr>
-      </p:cxnSp>
-      <p:cxnSp>
-        <p:nvCxnSpPr>
-          <p:cNvPr id="20" name="line19" descr="sci-ppt:C2-E02-019"/>
-          <p:cNvCxnSpPr/>
-          <p:nvPr/>
-        </p:nvCxnSpPr>
-        <p:spPr>
-          <a:xfrm>
-            <a:off x="7473696" y="2191758"/>
-            <a:ext cx="103632" cy="144285"/>
-          </a:xfrm>
-          <a:prstGeom prst="line">
-            <a:avLst/>
-          </a:prstGeom>
-          <a:ln w="25400">
-            <a:solidFill>
-              <a:srgbClr val="8EDBD4"/>
-            </a:solidFill>
-          </a:ln>
-          <a:effectLst/>
-        </p:spPr>
-      </p:cxnSp>
-      <p:cxnSp>
-        <p:nvCxnSpPr>
-          <p:cNvPr id="21" name="line20" descr="sci-ppt:C2-E02-020"/>
-          <p:cNvCxnSpPr/>
-          <p:nvPr/>
-        </p:nvCxnSpPr>
-        <p:spPr>
-          <a:xfrm>
-            <a:off x="7577328" y="2336043"/>
-            <a:ext cx="103632" cy="147392"/>
-          </a:xfrm>
-          <a:prstGeom prst="line">
-            <a:avLst/>
-          </a:prstGeom>
-          <a:ln w="25400">
-            <a:solidFill>
-              <a:srgbClr val="8EDBD4"/>
-            </a:solidFill>
-          </a:ln>
-          <a:effectLst/>
-        </p:spPr>
-      </p:cxnSp>
-      <p:cxnSp>
-        <p:nvCxnSpPr>
-          <p:cNvPr id="22" name="line21" descr="sci-ppt:C2-E02-021"/>
-          <p:cNvCxnSpPr/>
-          <p:nvPr/>
-        </p:nvCxnSpPr>
-        <p:spPr>
-          <a:xfrm>
-            <a:off x="7680960" y="2483435"/>
-            <a:ext cx="103632" cy="147417"/>
-          </a:xfrm>
-          <a:prstGeom prst="line">
-            <a:avLst/>
-          </a:prstGeom>
-          <a:ln w="25400">
-            <a:solidFill>
-              <a:srgbClr val="8EDBD4"/>
-            </a:solidFill>
-          </a:ln>
-          <a:effectLst/>
-        </p:spPr>
-      </p:cxnSp>
-      <p:cxnSp>
-        <p:nvCxnSpPr>
-          <p:cNvPr id="23" name="line22" descr="sci-ppt:C2-E02-022"/>
-          <p:cNvCxnSpPr/>
-          <p:nvPr/>
-        </p:nvCxnSpPr>
-        <p:spPr>
-          <a:xfrm>
-            <a:off x="7784592" y="2630852"/>
-            <a:ext cx="103632" cy="144651"/>
-          </a:xfrm>
-          <a:prstGeom prst="line">
-            <a:avLst/>
-          </a:prstGeom>
-          <a:ln w="25400">
-            <a:solidFill>
-              <a:srgbClr val="8EDBD4"/>
-            </a:solidFill>
-          </a:ln>
-          <a:effectLst/>
-        </p:spPr>
-      </p:cxnSp>
-      <p:cxnSp>
-        <p:nvCxnSpPr>
-          <p:cNvPr id="24" name="line23" descr="sci-ppt:C2-E02-023"/>
-          <p:cNvCxnSpPr/>
-          <p:nvPr/>
-        </p:nvCxnSpPr>
-        <p:spPr>
-          <a:xfrm>
-            <a:off x="7888224" y="2775503"/>
-            <a:ext cx="103632" cy="139464"/>
-          </a:xfrm>
-          <a:prstGeom prst="line">
-            <a:avLst/>
-          </a:prstGeom>
-          <a:ln w="25400">
-            <a:solidFill>
-              <a:srgbClr val="8EDBD4"/>
-            </a:solidFill>
-          </a:ln>
-          <a:effectLst/>
-        </p:spPr>
-      </p:cxnSp>
-      <p:cxnSp>
-        <p:nvCxnSpPr>
-          <p:cNvPr id="25" name="line24" descr="sci-ppt:C2-E02-024"/>
-          <p:cNvCxnSpPr/>
-          <p:nvPr/>
-        </p:nvCxnSpPr>
-        <p:spPr>
-          <a:xfrm>
-            <a:off x="7991856" y="2914967"/>
-            <a:ext cx="103632" cy="132274"/>
-          </a:xfrm>
-          <a:prstGeom prst="line">
-            <a:avLst/>
-          </a:prstGeom>
-          <a:ln w="25400">
-            <a:solidFill>
-              <a:srgbClr val="8EDBD4"/>
-            </a:solidFill>
-          </a:ln>
-          <a:effectLst/>
-        </p:spPr>
-      </p:cxnSp>
-      <p:cxnSp>
-        <p:nvCxnSpPr>
-          <p:cNvPr id="26" name="line25" descr="sci-ppt:C2-E02-025"/>
-          <p:cNvCxnSpPr/>
-          <p:nvPr/>
-        </p:nvCxnSpPr>
-        <p:spPr>
-          <a:xfrm>
-            <a:off x="8095488" y="3047241"/>
-            <a:ext cx="103632" cy="123526"/>
-          </a:xfrm>
-          <a:prstGeom prst="line">
-            <a:avLst/>
-          </a:prstGeom>
-          <a:ln w="25400">
-            <a:solidFill>
-              <a:srgbClr val="8EDBD4"/>
-            </a:solidFill>
-          </a:ln>
-          <a:effectLst/>
-        </p:spPr>
-      </p:cxnSp>
-      <p:cxnSp>
-        <p:nvCxnSpPr>
-          <p:cNvPr id="27" name="line26" descr="sci-ppt:C2-E02-026"/>
-          <p:cNvCxnSpPr/>
-          <p:nvPr/>
-        </p:nvCxnSpPr>
-        <p:spPr>
-          <a:xfrm>
-            <a:off x="8199120" y="3170767"/>
-            <a:ext cx="103632" cy="113666"/>
-          </a:xfrm>
-          <a:prstGeom prst="line">
-            <a:avLst/>
-          </a:prstGeom>
-          <a:ln w="25400">
-            <a:solidFill>
-              <a:srgbClr val="8EDBD4"/>
-            </a:solidFill>
-          </a:ln>
-          <a:effectLst/>
-        </p:spPr>
-      </p:cxnSp>
-      <p:cxnSp>
-        <p:nvCxnSpPr>
-          <p:cNvPr id="28" name="line27" descr="sci-ppt:C2-E02-027"/>
-          <p:cNvCxnSpPr/>
-          <p:nvPr/>
-        </p:nvCxnSpPr>
-        <p:spPr>
-          <a:xfrm>
-            <a:off x="8302752" y="3284433"/>
-            <a:ext cx="103632" cy="103123"/>
-          </a:xfrm>
-          <a:prstGeom prst="line">
-            <a:avLst/>
-          </a:prstGeom>
-          <a:ln w="25400">
-            <a:solidFill>
-              <a:srgbClr val="8EDBD4"/>
-            </a:solidFill>
-          </a:ln>
-          <a:effectLst/>
-        </p:spPr>
-      </p:cxnSp>
-      <p:cxnSp>
-        <p:nvCxnSpPr>
-          <p:cNvPr id="29" name="line28" descr="sci-ppt:C2-E02-028"/>
-          <p:cNvCxnSpPr/>
-          <p:nvPr/>
-        </p:nvCxnSpPr>
-        <p:spPr>
-          <a:xfrm>
-            <a:off x="8406384" y="3387556"/>
-            <a:ext cx="103632" cy="92287"/>
-          </a:xfrm>
-          <a:prstGeom prst="line">
-            <a:avLst/>
-          </a:prstGeom>
-          <a:ln w="25400">
-            <a:solidFill>
-              <a:srgbClr val="8EDBD4"/>
-            </a:solidFill>
-          </a:ln>
-          <a:effectLst/>
-        </p:spPr>
-      </p:cxnSp>
-      <p:cxnSp>
-        <p:nvCxnSpPr>
-          <p:cNvPr id="30" name="line29" descr="sci-ppt:C2-E02-029"/>
-          <p:cNvCxnSpPr/>
-          <p:nvPr/>
-        </p:nvCxnSpPr>
-        <p:spPr>
-          <a:xfrm>
-            <a:off x="8510016" y="3479843"/>
-            <a:ext cx="103632" cy="81502"/>
-          </a:xfrm>
-          <a:prstGeom prst="line">
-            <a:avLst/>
-          </a:prstGeom>
-          <a:ln w="25400">
-            <a:solidFill>
-              <a:srgbClr val="8EDBD4"/>
-            </a:solidFill>
-          </a:ln>
-          <a:effectLst/>
-        </p:spPr>
-      </p:cxnSp>
-      <p:cxnSp>
-        <p:nvCxnSpPr>
-          <p:cNvPr id="31" name="line30" descr="sci-ppt:C2-E02-030"/>
-          <p:cNvCxnSpPr/>
-          <p:nvPr/>
-        </p:nvCxnSpPr>
-        <p:spPr>
-          <a:xfrm>
-            <a:off x="8613648" y="3561345"/>
-            <a:ext cx="103632" cy="71053"/>
-          </a:xfrm>
-          <a:prstGeom prst="line">
-            <a:avLst/>
-          </a:prstGeom>
-          <a:ln w="25400">
-            <a:solidFill>
-              <a:srgbClr val="8EDBD4"/>
-            </a:solidFill>
-          </a:ln>
-          <a:effectLst/>
-        </p:spPr>
-      </p:cxnSp>
-      <p:cxnSp>
-        <p:nvCxnSpPr>
-          <p:cNvPr id="32" name="line31" descr="sci-ppt:C2-E02-031"/>
-          <p:cNvCxnSpPr/>
-          <p:nvPr/>
-        </p:nvCxnSpPr>
-        <p:spPr>
-          <a:xfrm>
-            <a:off x="8717280" y="3632398"/>
-            <a:ext cx="103632" cy="61167"/>
-          </a:xfrm>
-          <a:prstGeom prst="line">
-            <a:avLst/>
-          </a:prstGeom>
-          <a:ln w="25400">
-            <a:solidFill>
-              <a:srgbClr val="8EDBD4"/>
-            </a:solidFill>
-          </a:ln>
-          <a:effectLst/>
-        </p:spPr>
-      </p:cxnSp>
-      <p:cxnSp>
-        <p:nvCxnSpPr>
-          <p:cNvPr id="33" name="line32" descr="sci-ppt:C2-E02-032"/>
-          <p:cNvCxnSpPr/>
-          <p:nvPr/>
-        </p:nvCxnSpPr>
-        <p:spPr>
-          <a:xfrm>
-            <a:off x="8820912" y="3693565"/>
-            <a:ext cx="103632" cy="52008"/>
-          </a:xfrm>
-          <a:prstGeom prst="line">
-            <a:avLst/>
-          </a:prstGeom>
-          <a:ln w="25400">
-            <a:solidFill>
-              <a:srgbClr val="8EDBD4"/>
-            </a:solidFill>
-          </a:ln>
-          <a:effectLst/>
-        </p:spPr>
-      </p:cxnSp>
-      <p:cxnSp>
-        <p:nvCxnSpPr>
-          <p:cNvPr id="34" name="line33" descr="sci-ppt:C2-E02-033"/>
-          <p:cNvCxnSpPr/>
-          <p:nvPr/>
-        </p:nvCxnSpPr>
-        <p:spPr>
-          <a:xfrm>
-            <a:off x="8924544" y="3745573"/>
-            <a:ext cx="103632" cy="43687"/>
-          </a:xfrm>
-          <a:prstGeom prst="line">
-            <a:avLst/>
-          </a:prstGeom>
-          <a:ln w="25400">
-            <a:solidFill>
-              <a:srgbClr val="8EDBD4"/>
-            </a:solidFill>
-          </a:ln>
-          <a:effectLst/>
-        </p:spPr>
-      </p:cxnSp>
-      <p:cxnSp>
-        <p:nvCxnSpPr>
-          <p:cNvPr id="35" name="line34" descr="sci-ppt:C2-E02-034"/>
-          <p:cNvCxnSpPr/>
-          <p:nvPr/>
-        </p:nvCxnSpPr>
-        <p:spPr>
-          <a:xfrm>
-            <a:off x="9028176" y="3789260"/>
-            <a:ext cx="103632" cy="36260"/>
-          </a:xfrm>
-          <a:prstGeom prst="line">
-            <a:avLst/>
-          </a:prstGeom>
-          <a:ln w="25400">
-            <a:solidFill>
-              <a:srgbClr val="8EDBD4"/>
-            </a:solidFill>
-          </a:ln>
-          <a:effectLst/>
-        </p:spPr>
-      </p:cxnSp>
-      <p:cxnSp>
-        <p:nvCxnSpPr>
-          <p:cNvPr id="36" name="line35" descr="sci-ppt:C2-E02-035"/>
-          <p:cNvCxnSpPr/>
-          <p:nvPr/>
-        </p:nvCxnSpPr>
-        <p:spPr>
-          <a:xfrm>
-            <a:off x="9131808" y="3825520"/>
-            <a:ext cx="103632" cy="29744"/>
-          </a:xfrm>
-          <a:prstGeom prst="line">
-            <a:avLst/>
-          </a:prstGeom>
-          <a:ln w="25400">
-            <a:solidFill>
-              <a:srgbClr val="8EDBD4"/>
-            </a:solidFill>
-          </a:ln>
-          <a:effectLst/>
-        </p:spPr>
-      </p:cxnSp>
-      <p:cxnSp>
-        <p:nvCxnSpPr>
-          <p:cNvPr id="37" name="line36" descr="sci-ppt:C2-E02-036"/>
-          <p:cNvCxnSpPr/>
-          <p:nvPr/>
-        </p:nvCxnSpPr>
-        <p:spPr>
-          <a:xfrm>
-            <a:off x="9235440" y="3855264"/>
-            <a:ext cx="103632" cy="24114"/>
-          </a:xfrm>
-          <a:prstGeom prst="line">
-            <a:avLst/>
-          </a:prstGeom>
-          <a:ln w="25400">
-            <a:solidFill>
-              <a:srgbClr val="8EDBD4"/>
-            </a:solidFill>
-          </a:ln>
-          <a:effectLst/>
-        </p:spPr>
-      </p:cxnSp>
-      <p:cxnSp>
-        <p:nvCxnSpPr>
-          <p:cNvPr id="38" name="line37" descr="sci-ppt:C2-E02-037"/>
-          <p:cNvCxnSpPr/>
-          <p:nvPr/>
-        </p:nvCxnSpPr>
-        <p:spPr>
-          <a:xfrm>
-            <a:off x="9339072" y="3879378"/>
-            <a:ext cx="103632" cy="19327"/>
-          </a:xfrm>
-          <a:prstGeom prst="line">
-            <a:avLst/>
-          </a:prstGeom>
-          <a:ln w="25400">
-            <a:solidFill>
-              <a:srgbClr val="8EDBD4"/>
-            </a:solidFill>
-          </a:ln>
-          <a:effectLst/>
-        </p:spPr>
-      </p:cxnSp>
-      <p:cxnSp>
-        <p:nvCxnSpPr>
-          <p:cNvPr id="39" name="line38" descr="sci-ppt:C2-E02-038"/>
-          <p:cNvCxnSpPr/>
-          <p:nvPr/>
-        </p:nvCxnSpPr>
-        <p:spPr>
-          <a:xfrm>
-            <a:off x="9442704" y="3898705"/>
-            <a:ext cx="103632" cy="15314"/>
-          </a:xfrm>
-          <a:prstGeom prst="line">
-            <a:avLst/>
-          </a:prstGeom>
-          <a:ln w="25400">
-            <a:solidFill>
-              <a:srgbClr val="8EDBD4"/>
-            </a:solidFill>
-          </a:ln>
-          <a:effectLst/>
-        </p:spPr>
-      </p:cxnSp>
-      <p:cxnSp>
-        <p:nvCxnSpPr>
-          <p:cNvPr id="40" name="line39" descr="sci-ppt:C2-E02-039"/>
-          <p:cNvCxnSpPr/>
-          <p:nvPr/>
-        </p:nvCxnSpPr>
-        <p:spPr>
-          <a:xfrm>
-            <a:off x="9546336" y="3914019"/>
-            <a:ext cx="103632" cy="11998"/>
-          </a:xfrm>
-          <a:prstGeom prst="line">
-            <a:avLst/>
-          </a:prstGeom>
-          <a:ln w="25400">
-            <a:solidFill>
-              <a:srgbClr val="8EDBD4"/>
-            </a:solidFill>
-          </a:ln>
-          <a:effectLst/>
-        </p:spPr>
-      </p:cxnSp>
-      <p:cxnSp>
-        <p:nvCxnSpPr>
-          <p:cNvPr id="41" name="line40" descr="sci-ppt:C2-E02-040"/>
-          <p:cNvCxnSpPr/>
-          <p:nvPr/>
-        </p:nvCxnSpPr>
-        <p:spPr>
-          <a:xfrm>
-            <a:off x="9649968" y="3926017"/>
-            <a:ext cx="103632" cy="9294"/>
-          </a:xfrm>
-          <a:prstGeom prst="line">
-            <a:avLst/>
-          </a:prstGeom>
-          <a:ln w="25400">
-            <a:solidFill>
-              <a:srgbClr val="8EDBD4"/>
-            </a:solidFill>
-          </a:ln>
-          <a:effectLst/>
-        </p:spPr>
-      </p:cxnSp>
-      <p:cxnSp>
-        <p:nvCxnSpPr>
-          <p:cNvPr id="42" name="line41" descr="sci-ppt:C2-E02-041"/>
-          <p:cNvCxnSpPr/>
-          <p:nvPr/>
-        </p:nvCxnSpPr>
-        <p:spPr>
-          <a:xfrm>
-            <a:off x="9753600" y="3935311"/>
-            <a:ext cx="103632" cy="7121"/>
-          </a:xfrm>
-          <a:prstGeom prst="line">
-            <a:avLst/>
-          </a:prstGeom>
-          <a:ln w="25400">
-            <a:solidFill>
-              <a:srgbClr val="8EDBD4"/>
-            </a:solidFill>
-          </a:ln>
-          <a:effectLst/>
-        </p:spPr>
-      </p:cxnSp>
-      <p:cxnSp>
-        <p:nvCxnSpPr>
-          <p:cNvPr id="43" name="line42" descr="sci-ppt:C2-E02-042"/>
-          <p:cNvCxnSpPr/>
-          <p:nvPr/>
-        </p:nvCxnSpPr>
-        <p:spPr>
-          <a:xfrm>
-            <a:off x="9857232" y="3942432"/>
-            <a:ext cx="103632" cy="5396"/>
-          </a:xfrm>
-          <a:prstGeom prst="line">
-            <a:avLst/>
-          </a:prstGeom>
-          <a:ln w="25400">
-            <a:solidFill>
-              <a:srgbClr val="8EDBD4"/>
-            </a:solidFill>
-          </a:ln>
-          <a:effectLst/>
-        </p:spPr>
-      </p:cxnSp>
-      <p:cxnSp>
-        <p:nvCxnSpPr>
-          <p:cNvPr id="44" name="line43" descr="sci-ppt:C2-E02-043"/>
-          <p:cNvCxnSpPr/>
-          <p:nvPr/>
-        </p:nvCxnSpPr>
-        <p:spPr>
-          <a:xfrm>
-            <a:off x="9960864" y="3947828"/>
-            <a:ext cx="103632" cy="4043"/>
-          </a:xfrm>
-          <a:prstGeom prst="line">
-            <a:avLst/>
-          </a:prstGeom>
-          <a:ln w="25400">
-            <a:solidFill>
-              <a:srgbClr val="8EDBD4"/>
-            </a:solidFill>
-          </a:ln>
-          <a:effectLst/>
-        </p:spPr>
-      </p:cxnSp>
-      <p:cxnSp>
-        <p:nvCxnSpPr>
-          <p:cNvPr id="45" name="line44" descr="sci-ppt:C2-E02-044"/>
-          <p:cNvCxnSpPr/>
-          <p:nvPr/>
-        </p:nvCxnSpPr>
-        <p:spPr>
-          <a:xfrm>
-            <a:off x="10064496" y="3951871"/>
-            <a:ext cx="103632" cy="2997"/>
-          </a:xfrm>
-          <a:prstGeom prst="line">
-            <a:avLst/>
-          </a:prstGeom>
-          <a:ln w="25400">
-            <a:solidFill>
-              <a:srgbClr val="8EDBD4"/>
-            </a:solidFill>
-          </a:ln>
-          <a:effectLst/>
-        </p:spPr>
-      </p:cxnSp>
-      <p:cxnSp>
-        <p:nvCxnSpPr>
-          <p:cNvPr id="46" name="line45" descr="sci-ppt:C2-E02-045"/>
-          <p:cNvCxnSpPr/>
-          <p:nvPr/>
-        </p:nvCxnSpPr>
-        <p:spPr>
-          <a:xfrm>
-            <a:off x="10168128" y="3954868"/>
-            <a:ext cx="103632" cy="2198"/>
-          </a:xfrm>
-          <a:prstGeom prst="line">
-            <a:avLst/>
-          </a:prstGeom>
-          <a:ln w="25400">
-            <a:solidFill>
-              <a:srgbClr val="8EDBD4"/>
-            </a:solidFill>
-          </a:ln>
-          <a:effectLst/>
-        </p:spPr>
-      </p:cxnSp>
-      <p:cxnSp>
-        <p:nvCxnSpPr>
-          <p:cNvPr id="47" name="line46" descr="sci-ppt:C2-E02-046"/>
-          <p:cNvCxnSpPr/>
-          <p:nvPr/>
-        </p:nvCxnSpPr>
-        <p:spPr>
-          <a:xfrm>
-            <a:off x="10271760" y="3957066"/>
-            <a:ext cx="103632" cy="1593"/>
-          </a:xfrm>
-          <a:prstGeom prst="line">
-            <a:avLst/>
-          </a:prstGeom>
-          <a:ln w="25400">
-            <a:solidFill>
-              <a:srgbClr val="8EDBD4"/>
-            </a:solidFill>
-          </a:ln>
-          <a:effectLst/>
-        </p:spPr>
-      </p:cxnSp>
-      <p:cxnSp>
-        <p:nvCxnSpPr>
-          <p:cNvPr id="48" name="line47" descr="sci-ppt:C2-E02-047"/>
-          <p:cNvCxnSpPr/>
-          <p:nvPr/>
-        </p:nvCxnSpPr>
-        <p:spPr>
-          <a:xfrm>
-            <a:off x="10375392" y="3958659"/>
-            <a:ext cx="103632" cy="1144"/>
-          </a:xfrm>
-          <a:prstGeom prst="line">
-            <a:avLst/>
-          </a:prstGeom>
-          <a:ln w="25400">
-            <a:solidFill>
-              <a:srgbClr val="8EDBD4"/>
-            </a:solidFill>
-          </a:ln>
-          <a:effectLst/>
-        </p:spPr>
-      </p:cxnSp>
-      <p:cxnSp>
-        <p:nvCxnSpPr>
-          <p:cNvPr id="49" name="line48" descr="sci-ppt:C2-E02-048"/>
-          <p:cNvCxnSpPr/>
-          <p:nvPr/>
-        </p:nvCxnSpPr>
-        <p:spPr>
-          <a:xfrm>
-            <a:off x="10479024" y="3959803"/>
-            <a:ext cx="103632" cy="812"/>
-          </a:xfrm>
-          <a:prstGeom prst="line">
-            <a:avLst/>
-          </a:prstGeom>
-          <a:ln w="25400">
-            <a:solidFill>
-              <a:srgbClr val="8EDBD4"/>
-            </a:solidFill>
-          </a:ln>
-          <a:effectLst/>
-        </p:spPr>
-      </p:cxnSp>
-      <p:cxnSp>
-        <p:nvCxnSpPr>
-          <p:cNvPr id="50" name="line49" descr="sci-ppt:C2-E02-049"/>
-          <p:cNvCxnSpPr/>
-          <p:nvPr/>
-        </p:nvCxnSpPr>
-        <p:spPr>
-          <a:xfrm>
-            <a:off x="10582656" y="3960615"/>
-            <a:ext cx="103632" cy="570"/>
-          </a:xfrm>
-          <a:prstGeom prst="line">
-            <a:avLst/>
-          </a:prstGeom>
-          <a:ln w="25400">
-            <a:solidFill>
-              <a:srgbClr val="8EDBD4"/>
-            </a:solidFill>
-          </a:ln>
-          <a:effectLst/>
-        </p:spPr>
-      </p:cxnSp>
-      <p:cxnSp>
-        <p:nvCxnSpPr>
-          <p:cNvPr id="51" name="line50" descr="sci-ppt:C2-E02-050"/>
-          <p:cNvCxnSpPr/>
-          <p:nvPr/>
-        </p:nvCxnSpPr>
-        <p:spPr>
-          <a:xfrm>
-            <a:off x="10686288" y="3961185"/>
-            <a:ext cx="103632" cy="397"/>
-          </a:xfrm>
-          <a:prstGeom prst="line">
-            <a:avLst/>
-          </a:prstGeom>
-          <a:ln w="25400">
-            <a:solidFill>
-              <a:srgbClr val="8EDBD4"/>
-            </a:solidFill>
-          </a:ln>
-          <a:effectLst/>
-        </p:spPr>
-      </p:cxnSp>
-      <p:sp>
-        <p:nvSpPr>
-          <p:cNvPr id="52" name="text51" descr="sci-ppt:C2-E02-051"/>
+        <p:txBody>
+          <a:bodyPr rtlCol="0" anchor="ctr"/>
+          <a:lstStyle/>
+          <a:p>
+            <a:pPr algn="ctr"/>
+          </a:p>
+        </p:txBody>
+      </p:sp>
+      <p:sp>
+        <p:nvSpPr>
+          <p:cNvPr id="73" name="C2-E02 text 71" descr="sci-ppt:o071"/>
           <p:cNvSpPr txBox="1"/>
           <p:nvPr/>
         </p:nvSpPr>
         <p:spPr>
           <a:xfrm>
-            <a:off x="7254240" y="1036320"/>
-            <a:ext cx="4267200" cy="340156"/>
+            <a:off x="8918447" y="2108642"/>
+            <a:ext cx="2011680" cy="231648"/>
           </a:xfrm>
           <a:prstGeom prst="rect">
             <a:avLst/>
@@ -4326,7 +7908,7 @@
           <a:effectLst/>
         </p:spPr>
         <p:txBody>
-          <a:bodyPr wrap="none" lIns="27432" rIns="27432" tIns="18288" bIns="18288" anchor="ctr">
+          <a:bodyPr wrap="none" lIns="18288" rIns="18288" tIns="18288" bIns="18288" anchor="t">
             <a:spAutoFit/>
           </a:bodyPr>
           <a:lstStyle/>
@@ -4337,27 +7919,67 @@
               </a:spcAft>
             </a:pPr>
             <a:r>
-              <a:rPr sz="1728" b="0" i="0">
+              <a:rPr sz="1200" b="0" i="0">
+                <a:solidFill>
+                  <a:srgbClr val="8EDBD4"/>
+                </a:solidFill>
+                <a:latin typeface="Arial"/>
+              </a:rPr>
+              <a:t>86.5 % inside w</a:t>
+            </a:r>
+          </a:p>
+        </p:txBody>
+      </p:sp>
+      <p:sp>
+        <p:nvSpPr>
+          <p:cNvPr id="74" name="C2-E02 text 72" descr="sci-ppt:o072"/>
+          <p:cNvSpPr txBox="1"/>
+          <p:nvPr/>
+        </p:nvSpPr>
+        <p:spPr>
+          <a:xfrm>
+            <a:off x="868680" y="5733288"/>
+            <a:ext cx="10972800" cy="254889"/>
+          </a:xfrm>
+          <a:prstGeom prst="rect">
+            <a:avLst/>
+          </a:prstGeom>
+          <a:noFill/>
+          <a:effectLst/>
+        </p:spPr>
+        <p:txBody>
+          <a:bodyPr wrap="none" lIns="18288" rIns="18288" tIns="18288" bIns="18288" anchor="t">
+            <a:spAutoFit/>
+          </a:bodyPr>
+          <a:lstStyle/>
+          <a:p>
+            <a:pPr algn="l">
+              <a:spcAft>
+                <a:spcPts val="0"/>
+              </a:spcAft>
+            </a:pPr>
+            <a:r>
+              <a:rPr sz="1350" b="1" i="0">
                 <a:solidFill>
                   <a:srgbClr val="E7F0F3"/>
                 </a:solidFill>
                 <a:latin typeface="Arial"/>
               </a:rPr>
-              <a:t>Gaussian profile (prescribed)</a:t>
-            </a:r>
-          </a:p>
-        </p:txBody>
-      </p:sp>
-      <p:sp>
-        <p:nvSpPr>
-          <p:cNvPr id="53" name="text52" descr="sci-ppt:C2-E02-052"/>
+              <a:t>E_L = 2πF₀ ∫ r e^(−2r²/w²) dr = (πw²F₀/2) ∫ e^(−x) dx = π w² F₀ / 2     (x = 2r²/w²)</a:t>
+            </a:r>
+          </a:p>
+        </p:txBody>
+      </p:sp>
+      <p:sp>
+        <p:nvSpPr>
+          <p:cNvPr id="75" name="C2-E02 text 73" descr="sci-ppt:o073"/>
           <p:cNvSpPr txBox="1"/>
           <p:nvPr/>
         </p:nvSpPr>
         <p:spPr>
           <a:xfrm>
-            <a:off x="365760" y="4974336"/>
-            <a:ext cx="5547360" cy="321259"/>
+            <a:off x="868680" y="6126480"/>
+            <a:ext cx="10972800" cy="239395"/>
           </a:xfrm>
           <a:prstGeom prst="rect">
             <a:avLst/>
@@ -4366,7 +7988,7 @@
           <a:effectLst/>
         </p:spPr>
         <p:txBody>
-          <a:bodyPr wrap="none" lIns="27432" rIns="27432" tIns="18288" bIns="18288" anchor="ctr">
+          <a:bodyPr wrap="none" lIns="18288" rIns="18288" tIns="18288" bIns="18288" anchor="t">
             <a:spAutoFit/>
           </a:bodyPr>
           <a:lstStyle/>
@@ -4377,27 +7999,27 @@
               </a:spcAft>
             </a:pPr>
             <a:r>
-              <a:rPr sz="1632" b="0" i="0">
+              <a:rPr sz="1250" b="0" i="0">
                 <a:solidFill>
-                  <a:srgbClr val="E7F0F3"/>
+                  <a:srgbClr val="F2B880"/>
                 </a:solidFill>
                 <a:latin typeface="Arial"/>
               </a:rPr>
-              <a:t>E_L: sum over annuli</a:t>
-            </a:r>
-          </a:p>
-        </p:txBody>
-      </p:sp>
-      <p:sp>
-        <p:nvSpPr>
-          <p:cNvPr id="54" name="text53" descr="sci-ppt:C2-E02-053"/>
+              <a:t>Summing annular rings 2πr dr reproduces the closed form; the total is finite although the Gaussian never ends.</a:t>
+            </a:r>
+          </a:p>
+        </p:txBody>
+      </p:sp>
+      <p:sp>
+        <p:nvSpPr>
+          <p:cNvPr id="76" name="C2-E02 text 74" descr="sci-ppt:o074"/>
           <p:cNvSpPr txBox="1"/>
           <p:nvPr/>
         </p:nvSpPr>
         <p:spPr>
           <a:xfrm>
-            <a:off x="365760" y="5266944"/>
-            <a:ext cx="5547360" cy="321259"/>
+            <a:off x="320040" y="6510528"/>
+            <a:ext cx="11521440" cy="200660"/>
           </a:xfrm>
           <a:prstGeom prst="rect">
             <a:avLst/>
@@ -4406,7 +8028,7 @@
           <a:effectLst/>
         </p:spPr>
         <p:txBody>
-          <a:bodyPr wrap="none" lIns="27432" rIns="27432" tIns="18288" bIns="18288" anchor="ctr">
+          <a:bodyPr wrap="none" lIns="18288" rIns="18288" tIns="18288" bIns="18288" anchor="t">
             <a:spAutoFit/>
           </a:bodyPr>
           <a:lstStyle/>
@@ -4417,213 +8039,13 @@
               </a:spcAft>
             </a:pPr>
             <a:r>
-              <a:rPr sz="1632" b="0" i="0">
-                <a:solidFill>
-                  <a:srgbClr val="E7F0F3"/>
-                </a:solidFill>
-                <a:latin typeface="Arial"/>
-              </a:rPr>
-              <a:t>r, w: transverse geometry</a:t>
-            </a:r>
-          </a:p>
-        </p:txBody>
-      </p:sp>
-      <p:sp>
-        <p:nvSpPr>
-          <p:cNvPr id="55" name="text54" descr="sci-ppt:C2-E02-054"/>
-          <p:cNvSpPr txBox="1"/>
-          <p:nvPr/>
-        </p:nvSpPr>
-        <p:spPr>
-          <a:xfrm>
-            <a:off x="365760" y="5559552"/>
-            <a:ext cx="5547360" cy="321259"/>
-          </a:xfrm>
-          <a:prstGeom prst="rect">
-            <a:avLst/>
-          </a:prstGeom>
-          <a:noFill/>
-          <a:effectLst/>
-        </p:spPr>
-        <p:txBody>
-          <a:bodyPr wrap="none" lIns="27432" rIns="27432" tIns="18288" bIns="18288" anchor="ctr">
-            <a:spAutoFit/>
-          </a:bodyPr>
-          <a:lstStyle/>
-          <a:p>
-            <a:pPr algn="l">
-              <a:spcAft>
-                <a:spcPts val="0"/>
-              </a:spcAft>
-            </a:pPr>
-            <a:r>
-              <a:rPr sz="1632" b="0" i="0">
-                <a:solidFill>
-                  <a:srgbClr val="E7F0F3"/>
-                </a:solidFill>
-                <a:latin typeface="Arial"/>
-              </a:rPr>
-              <a:t>π: circular annuli</a:t>
-            </a:r>
-          </a:p>
-        </p:txBody>
-      </p:sp>
-      <p:sp>
-        <p:nvSpPr>
-          <p:cNvPr id="56" name="text55" descr="sci-ppt:C2-E02-055"/>
-          <p:cNvSpPr txBox="1"/>
-          <p:nvPr/>
-        </p:nvSpPr>
-        <p:spPr>
-          <a:xfrm>
-            <a:off x="6156960" y="4974336"/>
-            <a:ext cx="5547360" cy="321259"/>
-          </a:xfrm>
-          <a:prstGeom prst="rect">
-            <a:avLst/>
-          </a:prstGeom>
-          <a:noFill/>
-          <a:effectLst/>
-        </p:spPr>
-        <p:txBody>
-          <a:bodyPr wrap="none" lIns="27432" rIns="27432" tIns="18288" bIns="18288" anchor="ctr">
-            <a:spAutoFit/>
-          </a:bodyPr>
-          <a:lstStyle/>
-          <a:p>
-            <a:pPr algn="l">
-              <a:spcAft>
-                <a:spcPts val="0"/>
-              </a:spcAft>
-            </a:pPr>
-            <a:r>
-              <a:rPr sz="1632" b="0" i="0">
-                <a:solidFill>
-                  <a:srgbClr val="E7F0F3"/>
-                </a:solidFill>
-                <a:latin typeface="Arial"/>
-              </a:rPr>
-              <a:t>F₀: central fluence</a:t>
-            </a:r>
-          </a:p>
-        </p:txBody>
-      </p:sp>
-      <p:sp>
-        <p:nvSpPr>
-          <p:cNvPr id="57" name="text56" descr="sci-ppt:C2-E02-056"/>
-          <p:cNvSpPr txBox="1"/>
-          <p:nvPr/>
-        </p:nvSpPr>
-        <p:spPr>
-          <a:xfrm>
-            <a:off x="6156960" y="5266944"/>
-            <a:ext cx="5547360" cy="321259"/>
-          </a:xfrm>
-          <a:prstGeom prst="rect">
-            <a:avLst/>
-          </a:prstGeom>
-          <a:noFill/>
-          <a:effectLst/>
-        </p:spPr>
-        <p:txBody>
-          <a:bodyPr wrap="none" lIns="27432" rIns="27432" tIns="18288" bIns="18288" anchor="ctr">
-            <a:spAutoFit/>
-          </a:bodyPr>
-          <a:lstStyle/>
-          <a:p>
-            <a:pPr algn="l">
-              <a:spcAft>
-                <a:spcPts val="0"/>
-              </a:spcAft>
-            </a:pPr>
-            <a:r>
-              <a:rPr sz="1632" b="0" i="0">
-                <a:solidFill>
-                  <a:srgbClr val="E7F0F3"/>
-                </a:solidFill>
-                <a:latin typeface="Arial"/>
-              </a:rPr>
-              <a:t>x = 2r²/w²</a:t>
-            </a:r>
-          </a:p>
-        </p:txBody>
-      </p:sp>
-      <p:sp>
-        <p:nvSpPr>
-          <p:cNvPr id="58" name="text57" descr="sci-ppt:C2-E02-057"/>
-          <p:cNvSpPr txBox="1"/>
-          <p:nvPr/>
-        </p:nvSpPr>
-        <p:spPr>
-          <a:xfrm>
-            <a:off x="365760" y="6278880"/>
-            <a:ext cx="11277600" cy="302361"/>
-          </a:xfrm>
-          <a:prstGeom prst="rect">
-            <a:avLst/>
-          </a:prstGeom>
-          <a:noFill/>
-          <a:effectLst/>
-        </p:spPr>
-        <p:txBody>
-          <a:bodyPr wrap="none" lIns="27432" rIns="27432" tIns="18288" bIns="18288" anchor="ctr">
-            <a:spAutoFit/>
-          </a:bodyPr>
-          <a:lstStyle/>
-          <a:p>
-            <a:pPr algn="l">
-              <a:spcAft>
-                <a:spcPts val="0"/>
-              </a:spcAft>
-            </a:pPr>
-            <a:r>
-              <a:rPr sz="1536" b="0" i="0">
+              <a:rPr sz="1000" b="0" i="0">
                 <a:solidFill>
                   <a:srgbClr val="B4C7D2"/>
                 </a:solidFill>
                 <a:latin typeface="Arial"/>
               </a:rPr>
-              <a:t>Annulus area = 2πr dr</a:t>
-            </a:r>
-          </a:p>
-        </p:txBody>
-      </p:sp>
-      <p:sp>
-        <p:nvSpPr>
-          <p:cNvPr id="59" name="text58" descr="sci-ppt:C2-E02-058"/>
-          <p:cNvSpPr txBox="1"/>
-          <p:nvPr/>
-        </p:nvSpPr>
-        <p:spPr>
-          <a:xfrm>
-            <a:off x="365760" y="6571488"/>
-            <a:ext cx="11277600" cy="302361"/>
-          </a:xfrm>
-          <a:prstGeom prst="rect">
-            <a:avLst/>
-          </a:prstGeom>
-          <a:noFill/>
-          <a:effectLst/>
-        </p:spPr>
-        <p:txBody>
-          <a:bodyPr wrap="none" lIns="27432" rIns="27432" tIns="18288" bIns="18288" anchor="ctr">
-            <a:spAutoFit/>
-          </a:bodyPr>
-          <a:lstStyle/>
-          <a:p>
-            <a:pPr algn="l">
-              <a:spcAft>
-                <a:spcPts val="0"/>
-              </a:spcAft>
-            </a:pPr>
-            <a:r>
-              <a:rPr sz="1536" b="0" i="0">
-                <a:solidFill>
-                  <a:srgbClr val="B4C7D2"/>
-                </a:solidFill>
-                <a:latin typeface="Arial"/>
-              </a:rPr>
-              <a:t>Integral of e⁻ˣ from 0 to infinity = 1</a:t>
+              <a:t>Ring weights and cumulative energy from Eq. C2-E02.</a:t>
             </a:r>
           </a:p>
         </p:txBody>
